--- a/docs/Job-Assistant-Pitch.pptx
+++ b/docs/Job-Assistant-Pitch.pptx
@@ -4,6 +4,9 @@
   <p:sldMasterIdLst>
     <p:sldMasterId id="2147483648" r:id="rId1"/>
   </p:sldMasterIdLst>
+  <p:notesMasterIdLst>
+    <p:notesMasterId r:id="rId15"/>
+  </p:notesMasterIdLst>
   <p:sldIdLst>
     <p:sldId id="256" r:id="rId2"/>
     <p:sldId id="257" r:id="rId3"/>
@@ -19,9 +22,6 @@
     <p:sldId id="267" r:id="rId13"/>
     <p:sldId id="268" r:id="rId14"/>
   </p:sldIdLst>
-  <p:notesMasterIdLst>
-    <p:notesMasterId r:id="rId15"/>
-  </p:notesMasterIdLst>
   <p:sldSz cx="12192000" cy="6858000"/>
   <p:notesSz cx="6858000" cy="12192000"/>
   <p:defaultTextStyle>
@@ -116,13 +116,20 @@
       </a:defRPr>
     </a:lvl9pPr>
   </p:defaultTextStyle>
+  <p:extLst>
+    <p:ext uri="{EFAFB233-063F-42B5-8137-9DF3F51BA10A}">
+      <p15:sldGuideLst xmlns:p15="http://schemas.microsoft.com/office/powerpoint/2012/main"/>
+    </p:ext>
+  </p:extLst>
 </p:presentation>
 </file>
 
 <file path=ppt/charts/chart1.xml><?xml version="1.0" encoding="utf-8"?>
-<c:chartSpace xmlns:c="http://schemas.openxmlformats.org/drawingml/2006/chart" xmlns:a="http://schemas.openxmlformats.org/drawingml/2006/main" xmlns:r="http://schemas.openxmlformats.org/officeDocument/2006/relationships">
+<c:chartSpace xmlns:c="http://schemas.openxmlformats.org/drawingml/2006/chart" xmlns:a="http://schemas.openxmlformats.org/drawingml/2006/main" xmlns:r="http://schemas.openxmlformats.org/officeDocument/2006/relationships" xmlns:c16r2="http://schemas.microsoft.com/office/drawing/2015/06/chart">
   <c:date1904 val="0"/>
+  <c:lang val="en-US"/>
   <c:roundedCorners val="1"/>
+  <c:style val="2"/>
   <c:chart>
     <c:title>
       <c:tx>
@@ -139,7 +146,7 @@
               </a:defRPr>
             </a:pPr>
             <a:r>
-              <a:rPr sz="1300" b="0" i="0" u="none" strike="noStrike">
+              <a:rPr lang="en-ZW" sz="1300" b="0" i="0" u="none" strike="noStrike">
                 <a:solidFill>
                   <a:srgbClr val="17263D"/>
                 </a:solidFill>
@@ -150,7 +157,6 @@
           </a:p>
         </c:rich>
       </c:tx>
-      <c:layout/>
       <c:overlay val="0"/>
     </c:title>
     <c:autoTitleDeleted val="0"/>
@@ -181,51 +187,25 @@
             <a:effectLst/>
           </c:spPr>
           <c:invertIfNegative val="0"/>
-          <c:dLbls>
-            <c:numFmt formatCode="0&quot;%&quot;" sourceLinked="0"/>
-            <c:txPr>
-              <a:bodyPr/>
-              <a:lstStyle/>
-              <a:p>
-                <a:pPr>
-                  <a:defRPr b="0" i="0" strike="noStrike" sz="1100" u="none">
-                    <a:solidFill>
-                      <a:srgbClr val="17263D"/>
-                    </a:solidFill>
-                    <a:latin typeface="Calibri"/>
-                  </a:defRPr>
-                </a:pPr>
-              </a:p>
-            </c:txPr>
-            <c:showLegendKey val="0"/>
-            <c:showVal val="1"/>
-            <c:showCatName val="0"/>
-            <c:showSerName val="0"/>
-            <c:showPercent val="0"/>
-            <c:showBubbleSize val="0"/>
-            <c:showLeaderLines val="0"/>
-          </c:dLbls>
           <c:dPt>
             <c:idx val="0"/>
             <c:invertIfNegative val="0"/>
             <c:bubble3D val="0"/>
-            <c:spPr>
-              <a:solidFill>
-                <a:srgbClr val="02C39A"/>
-              </a:solidFill>
-              <a:effectLst/>
-            </c:spPr>
+            <c:extLst>
+              <c:ext xmlns:c16="http://schemas.microsoft.com/office/drawing/2014/chart" uri="{C3380CC4-5D6E-409C-BE32-E72D297353CC}">
+                <c16:uniqueId val="{00000001-B0D5-42B7-B561-12CB802FFA94}"/>
+              </c:ext>
+            </c:extLst>
           </c:dPt>
           <c:dPt>
             <c:idx val="1"/>
             <c:invertIfNegative val="0"/>
             <c:bubble3D val="0"/>
-            <c:spPr>
-              <a:solidFill>
-                <a:srgbClr val="02C39A"/>
-              </a:solidFill>
-              <a:effectLst/>
-            </c:spPr>
+            <c:extLst>
+              <c:ext xmlns:c16="http://schemas.microsoft.com/office/drawing/2014/chart" uri="{C3380CC4-5D6E-409C-BE32-E72D297353CC}">
+                <c16:uniqueId val="{00000003-B0D5-42B7-B561-12CB802FFA94}"/>
+              </c:ext>
+            </c:extLst>
           </c:dPt>
           <c:dPt>
             <c:idx val="2"/>
@@ -237,6 +217,11 @@
               </a:solidFill>
               <a:effectLst/>
             </c:spPr>
+            <c:extLst>
+              <c:ext xmlns:c16="http://schemas.microsoft.com/office/drawing/2014/chart" uri="{C3380CC4-5D6E-409C-BE32-E72D297353CC}">
+                <c16:uniqueId val="{00000005-B0D5-42B7-B561-12CB802FFA94}"/>
+              </c:ext>
+            </c:extLst>
           </c:dPt>
           <c:dPt>
             <c:idx val="3"/>
@@ -248,28 +233,68 @@
               </a:solidFill>
               <a:effectLst/>
             </c:spPr>
+            <c:extLst>
+              <c:ext xmlns:c16="http://schemas.microsoft.com/office/drawing/2014/chart" uri="{C3380CC4-5D6E-409C-BE32-E72D297353CC}">
+                <c16:uniqueId val="{00000007-B0D5-42B7-B561-12CB802FFA94}"/>
+              </c:ext>
+            </c:extLst>
           </c:dPt>
+          <c:dLbls>
+            <c:numFmt formatCode="0&quot;%&quot;" sourceLinked="0"/>
+            <c:spPr>
+              <a:noFill/>
+              <a:ln>
+                <a:noFill/>
+              </a:ln>
+              <a:effectLst/>
+            </c:spPr>
+            <c:txPr>
+              <a:bodyPr/>
+              <a:lstStyle/>
+              <a:p>
+                <a:pPr>
+                  <a:defRPr sz="1100" b="0" i="0" u="none" strike="noStrike">
+                    <a:solidFill>
+                      <a:srgbClr val="17263D"/>
+                    </a:solidFill>
+                    <a:latin typeface="Calibri"/>
+                  </a:defRPr>
+                </a:pPr>
+                <a:endParaRPr lang="en-US"/>
+              </a:p>
+            </c:txPr>
+            <c:showLegendKey val="0"/>
+            <c:showVal val="1"/>
+            <c:showCatName val="0"/>
+            <c:showSerName val="0"/>
+            <c:showPercent val="0"/>
+            <c:showBubbleSize val="0"/>
+            <c:showLeaderLines val="0"/>
+            <c:extLst>
+              <c:ext xmlns:c15="http://schemas.microsoft.com/office/drawing/2012/chart" uri="{CE6537A1-D6FC-4f65-9D91-7224C49458BB}">
+                <c15:showLeaderLines val="0"/>
+              </c:ext>
+            </c:extLst>
+          </c:dLbls>
           <c:cat>
-            <c:multiLvlStrRef>
+            <c:strRef>
               <c:f>Sheet1!$A$2:$A$5</c:f>
-              <c:multiLvlStrCache>
+              <c:strCache>
                 <c:ptCount val="4"/>
-                <c:lvl>
-                  <c:pt idx="0">
-                    <c:v>Workers AI</c:v>
-                  </c:pt>
-                  <c:pt idx="1">
-                    <c:v>GPT mini</c:v>
-                  </c:pt>
-                  <c:pt idx="2">
-                    <c:v>GPT flagship</c:v>
-                  </c:pt>
-                  <c:pt idx="3">
-                    <c:v>Claude Sonnet</c:v>
-                  </c:pt>
-                </c:lvl>
-              </c:multiLvlStrCache>
-            </c:multiLvlStrRef>
+                <c:pt idx="0">
+                  <c:v>Workers AI</c:v>
+                </c:pt>
+                <c:pt idx="1">
+                  <c:v>GPT mini</c:v>
+                </c:pt>
+                <c:pt idx="2">
+                  <c:v>GPT flagship</c:v>
+                </c:pt>
+                <c:pt idx="3">
+                  <c:v>Claude Sonnet</c:v>
+                </c:pt>
+              </c:strCache>
+            </c:strRef>
           </c:cat>
           <c:val>
             <c:numRef>
@@ -292,36 +317,23 @@
               </c:numCache>
             </c:numRef>
           </c:val>
+          <c:extLst>
+            <c:ext xmlns:c16="http://schemas.microsoft.com/office/drawing/2014/chart" uri="{C3380CC4-5D6E-409C-BE32-E72D297353CC}">
+              <c16:uniqueId val="{00000008-B0D5-42B7-B561-12CB802FFA94}"/>
+            </c:ext>
+          </c:extLst>
         </c:ser>
         <c:dLbls>
-          <c:numFmt formatCode="0&quot;%&quot;" sourceLinked="0"/>
-          <c:txPr>
-            <a:bodyPr/>
-            <a:lstStyle/>
-            <a:p>
-              <a:pPr>
-                <a:defRPr b="0" i="0" strike="noStrike" sz="1100" u="none">
-                  <a:solidFill>
-                    <a:srgbClr val="17263D"/>
-                  </a:solidFill>
-                  <a:latin typeface="Calibri"/>
-                </a:defRPr>
-              </a:pPr>
-            </a:p>
-          </c:txPr>
           <c:showLegendKey val="0"/>
           <c:showVal val="1"/>
           <c:showCatName val="0"/>
           <c:showSerName val="0"/>
           <c:showPercent val="0"/>
           <c:showBubbleSize val="0"/>
-          <c:showLeaderLines val="0"/>
         </c:dLbls>
         <c:gapWidth val="55"/>
-        <c:overlap val="0"/>
         <c:axId val="2094734554"/>
         <c:axId val="2094734552"/>
-        <c:axId val="2094734556"/>
       </c:barChart>
       <c:catAx>
         <c:axId val="2094734554"/>
@@ -362,6 +374,7 @@
         <c:crosses val="autoZero"/>
         <c:auto val="1"/>
         <c:lblAlgn val="ctr"/>
+        <c:lblOffset val="100"/>
         <c:noMultiLvlLbl val="1"/>
       </c:catAx>
       <c:valAx>
@@ -376,30 +389,6 @@
         <c:majorTickMark val="out"/>
         <c:minorTickMark val="none"/>
         <c:tickLblPos val="nextTo"/>
-        <c:spPr>
-          <a:ln w="12700" cap="flat">
-            <a:solidFill>
-              <a:srgbClr val="888888"/>
-            </a:solidFill>
-            <a:prstDash val="solid"/>
-            <a:round/>
-          </a:ln>
-        </c:spPr>
-        <c:txPr>
-          <a:bodyPr/>
-          <a:lstStyle/>
-          <a:p>
-            <a:pPr>
-              <a:defRPr sz="1200" b="0" i="0" u="none" strike="noStrike">
-                <a:solidFill>
-                  <a:srgbClr val="000000"/>
-                </a:solidFill>
-                <a:latin typeface="Arial"/>
-              </a:defRPr>
-            </a:pPr>
-            <a:endParaRPr lang="en-US"/>
-          </a:p>
-        </c:txPr>
         <c:crossAx val="2094734554"/>
         <c:crosses val="autoZero"/>
         <c:crossBetween val="between"/>
@@ -414,6 +403,7 @@
     </c:plotArea>
     <c:plotVisOnly val="1"/>
     <c:dispBlanksAs val="span"/>
+    <c:showDLblsOverMax val="1"/>
   </c:chart>
   <c:spPr>
     <a:noFill/>
@@ -450,234 +440,10 @@
           <a:chExt cx="0" cy="0"/>
         </a:xfrm>
       </p:grpSpPr>
-      <p:sp>
-        <p:nvSpPr>
-          <p:cNvPr id="2" name="Header Placeholder 1"/>
-          <p:cNvSpPr>
-            <a:spLocks noGrp="1"/>
-          </p:cNvSpPr>
-          <p:nvPr>
-            <p:ph type="hdr" sz="quarter"/>
-          </p:nvPr>
-        </p:nvSpPr>
-        <p:spPr>
-          <a:xfrm>
-            <a:off x="0" y="0"/>
-            <a:ext cx="2971800" cy="458788"/>
-          </a:xfrm>
-          <a:prstGeom prst="rect">
-            <a:avLst/>
-          </a:prstGeom>
-        </p:spPr>
-        <p:txBody>
-          <a:bodyPr vert="horz" lIns="91440" tIns="45720" rIns="91440" bIns="45720" rtlCol="0"/>
-          <a:lstStyle>
-            <a:lvl1pPr algn="l">
-              <a:defRPr sz="1200"/>
-            </a:lvl1pPr>
-          </a:lstStyle>
-          <a:p>
-            <a:endParaRPr lang="en-US"/>
-          </a:p>
-        </p:txBody>
-      </p:sp>
-      <p:sp>
-        <p:nvSpPr>
-          <p:cNvPr id="3" name="Date Placeholder 2"/>
-          <p:cNvSpPr>
-            <a:spLocks noGrp="1"/>
-          </p:cNvSpPr>
-          <p:nvPr>
-            <p:ph type="dt" idx="1"/>
-          </p:nvPr>
-        </p:nvSpPr>
-        <p:spPr>
-          <a:xfrm>
-            <a:off x="3884613" y="0"/>
-            <a:ext cx="2971800" cy="458788"/>
-          </a:xfrm>
-          <a:prstGeom prst="rect">
-            <a:avLst/>
-          </a:prstGeom>
-        </p:spPr>
-        <p:txBody>
-          <a:bodyPr vert="horz" lIns="91440" tIns="45720" rIns="91440" bIns="45720" rtlCol="0"/>
-          <a:lstStyle>
-            <a:lvl1pPr algn="r">
-              <a:defRPr sz="1200"/>
-            </a:lvl1pPr>
-          </a:lstStyle>
-          <a:p>
-            <a:fld id="{5282F153-3F37-0F45-9E97-73ACFA13230C}" type="datetimeFigureOut">
-              <a:rPr lang="en-US"/>
-              <a:t>7/23/19</a:t>
-            </a:fld>
-            <a:endParaRPr lang="en-US"/>
-          </a:p>
-        </p:txBody>
-      </p:sp>
-      <p:sp>
-        <p:nvSpPr>
-          <p:cNvPr id="4" name="Slide Image Placeholder 3"/>
-          <p:cNvSpPr>
-            <a:spLocks noGrp="1" noRot="1" noChangeAspect="1"/>
-          </p:cNvSpPr>
-          <p:nvPr>
-            <p:ph type="sldImg" idx="2"/>
-          </p:nvPr>
-        </p:nvSpPr>
-        <p:spPr>
-          <a:xfrm>
-            <a:off x="685800" y="1143000"/>
-            <a:ext cx="5486400" cy="3086100"/>
-          </a:xfrm>
-          <a:prstGeom prst="rect">
-            <a:avLst/>
-          </a:prstGeom>
-          <a:noFill/>
-          <a:ln w="12700">
-            <a:solidFill>
-              <a:prstClr val="black"/>
-            </a:solidFill>
-          </a:ln>
-        </p:spPr>
-        <p:txBody>
-          <a:bodyPr vert="horz" lIns="91440" tIns="45720" rIns="91440" bIns="45720" rtlCol="0" anchor="ctr"/>
-          <a:lstStyle/>
-          <a:p>
-            <a:endParaRPr lang="en-US"/>
-          </a:p>
-        </p:txBody>
-      </p:sp>
-      <p:sp>
-        <p:nvSpPr>
-          <p:cNvPr id="5" name="Notes Placeholder 4"/>
-          <p:cNvSpPr>
-            <a:spLocks noGrp="1"/>
-          </p:cNvSpPr>
-          <p:nvPr>
-            <p:ph type="body" sz="quarter" idx="3"/>
-          </p:nvPr>
-        </p:nvSpPr>
-        <p:spPr>
-          <a:xfrm>
-            <a:off x="685800" y="4400550"/>
-            <a:ext cx="5486400" cy="3600450"/>
-          </a:xfrm>
-          <a:prstGeom prst="rect">
-            <a:avLst/>
-          </a:prstGeom>
-        </p:spPr>
-        <p:txBody>
-          <a:bodyPr vert="horz" lIns="91440" tIns="45720" rIns="91440" bIns="45720" rtlCol="0"/>
-          <a:lstStyle/>
-          <a:p>
-            <a:pPr lvl="0"/>
-            <a:r>
-              <a:rPr lang="en-US"/>
-              <a:t>Click to edit Master text styles</a:t>
-            </a:r>
-          </a:p>
-          <a:p>
-            <a:pPr lvl="1"/>
-            <a:r>
-              <a:rPr lang="en-US"/>
-              <a:t>Second level</a:t>
-            </a:r>
-          </a:p>
-          <a:p>
-            <a:pPr lvl="2"/>
-            <a:r>
-              <a:rPr lang="en-US"/>
-              <a:t>Third level</a:t>
-            </a:r>
-          </a:p>
-          <a:p>
-            <a:pPr lvl="3"/>
-            <a:r>
-              <a:rPr lang="en-US"/>
-              <a:t>Fourth level</a:t>
-            </a:r>
-          </a:p>
-          <a:p>
-            <a:pPr lvl="4"/>
-            <a:r>
-              <a:rPr lang="en-US"/>
-              <a:t>Fifth level</a:t>
-            </a:r>
-          </a:p>
-        </p:txBody>
-      </p:sp>
-      <p:sp>
-        <p:nvSpPr>
-          <p:cNvPr id="6" name="Footer Placeholder 5"/>
-          <p:cNvSpPr>
-            <a:spLocks noGrp="1"/>
-          </p:cNvSpPr>
-          <p:nvPr>
-            <p:ph type="ftr" sz="quarter" idx="4"/>
-          </p:nvPr>
-        </p:nvSpPr>
-        <p:spPr>
-          <a:xfrm>
-            <a:off x="0" y="8685213"/>
-            <a:ext cx="2971800" cy="458787"/>
-          </a:xfrm>
-          <a:prstGeom prst="rect">
-            <a:avLst/>
-          </a:prstGeom>
-        </p:spPr>
-        <p:txBody>
-          <a:bodyPr vert="horz" lIns="91440" tIns="45720" rIns="91440" bIns="45720" rtlCol="0" anchor="b"/>
-          <a:lstStyle>
-            <a:lvl1pPr algn="l">
-              <a:defRPr sz="1200"/>
-            </a:lvl1pPr>
-          </a:lstStyle>
-          <a:p>
-            <a:endParaRPr lang="en-US"/>
-          </a:p>
-        </p:txBody>
-      </p:sp>
-      <p:sp>
-        <p:nvSpPr>
-          <p:cNvPr id="7" name="Slide Number Placeholder 6"/>
-          <p:cNvSpPr>
-            <a:spLocks noGrp="1"/>
-          </p:cNvSpPr>
-          <p:nvPr>
-            <p:ph type="sldNum" sz="quarter" idx="5"/>
-          </p:nvPr>
-        </p:nvSpPr>
-        <p:spPr>
-          <a:xfrm>
-            <a:off x="3884613" y="8685213"/>
-            <a:ext cx="2971800" cy="458787"/>
-          </a:xfrm>
-          <a:prstGeom prst="rect">
-            <a:avLst/>
-          </a:prstGeom>
-        </p:spPr>
-        <p:txBody>
-          <a:bodyPr vert="horz" lIns="91440" tIns="45720" rIns="91440" bIns="45720" rtlCol="0" anchor="b"/>
-          <a:lstStyle>
-            <a:lvl1pPr algn="r">
-              <a:defRPr sz="1200"/>
-            </a:lvl1pPr>
-          </a:lstStyle>
-          <a:p>
-            <a:fld id="{CE5E9CC1-C706-0F49-92D6-E571CC5EEA8F}" type="slidenum">
-              <a:rPr lang="en-US"/>
-              <a:t>‹#›</a:t>
-            </a:fld>
-            <a:endParaRPr lang="en-US"/>
-          </a:p>
-        </p:txBody>
-      </p:sp>
     </p:spTree>
     <p:extLst>
       <p:ext uri="{BB962C8B-B14F-4D97-AF65-F5344CB8AC3E}">
-        <p14:creationId xmlns:p14="http://schemas.microsoft.com/office/powerpoint/2010/main" val="1024086991"/>
+        <p14:creationId xmlns:p14="http://schemas.microsoft.com/office/powerpoint/2010/main" val="4215460169"/>
       </p:ext>
     </p:extLst>
   </p:cSld>
@@ -821,10 +587,6 @@
           <a:bodyPr/>
           <a:lstStyle/>
           <a:p>
-            <a:r>
-              <a:rPr lang="en-US" dirty="0"/>
-              <a:t/>
-            </a:r>
             <a:endParaRPr lang="en-US" dirty="0"/>
           </a:p>
         </p:txBody>
@@ -909,10 +671,6 @@
           <a:bodyPr/>
           <a:lstStyle/>
           <a:p>
-            <a:r>
-              <a:rPr lang="en-US" dirty="0"/>
-              <a:t/>
-            </a:r>
             <a:endParaRPr lang="en-US" dirty="0"/>
           </a:p>
         </p:txBody>
@@ -997,10 +755,6 @@
           <a:bodyPr/>
           <a:lstStyle/>
           <a:p>
-            <a:r>
-              <a:rPr lang="en-US" dirty="0"/>
-              <a:t/>
-            </a:r>
             <a:endParaRPr lang="en-US" dirty="0"/>
           </a:p>
         </p:txBody>
@@ -1085,10 +839,6 @@
           <a:bodyPr/>
           <a:lstStyle/>
           <a:p>
-            <a:r>
-              <a:rPr lang="en-US" dirty="0"/>
-              <a:t/>
-            </a:r>
             <a:endParaRPr lang="en-US" dirty="0"/>
           </a:p>
         </p:txBody>
@@ -1173,10 +923,6 @@
           <a:bodyPr/>
           <a:lstStyle/>
           <a:p>
-            <a:r>
-              <a:rPr lang="en-US" dirty="0"/>
-              <a:t/>
-            </a:r>
             <a:endParaRPr lang="en-US" dirty="0"/>
           </a:p>
         </p:txBody>
@@ -1261,10 +1007,6 @@
           <a:bodyPr/>
           <a:lstStyle/>
           <a:p>
-            <a:r>
-              <a:rPr lang="en-US" dirty="0"/>
-              <a:t/>
-            </a:r>
             <a:endParaRPr lang="en-US" dirty="0"/>
           </a:p>
         </p:txBody>
@@ -1349,10 +1091,6 @@
           <a:bodyPr/>
           <a:lstStyle/>
           <a:p>
-            <a:r>
-              <a:rPr lang="en-US" dirty="0"/>
-              <a:t/>
-            </a:r>
             <a:endParaRPr lang="en-US" dirty="0"/>
           </a:p>
         </p:txBody>
@@ -1437,10 +1175,6 @@
           <a:bodyPr/>
           <a:lstStyle/>
           <a:p>
-            <a:r>
-              <a:rPr lang="en-US" dirty="0"/>
-              <a:t/>
-            </a:r>
             <a:endParaRPr lang="en-US" dirty="0"/>
           </a:p>
         </p:txBody>
@@ -1525,10 +1259,6 @@
           <a:bodyPr/>
           <a:lstStyle/>
           <a:p>
-            <a:r>
-              <a:rPr lang="en-US" dirty="0"/>
-              <a:t/>
-            </a:r>
             <a:endParaRPr lang="en-US" dirty="0"/>
           </a:p>
         </p:txBody>
@@ -1613,10 +1343,6 @@
           <a:bodyPr/>
           <a:lstStyle/>
           <a:p>
-            <a:r>
-              <a:rPr lang="en-US" dirty="0"/>
-              <a:t/>
-            </a:r>
             <a:endParaRPr lang="en-US" dirty="0"/>
           </a:p>
         </p:txBody>
@@ -1701,10 +1427,6 @@
           <a:bodyPr/>
           <a:lstStyle/>
           <a:p>
-            <a:r>
-              <a:rPr lang="en-US" dirty="0"/>
-              <a:t/>
-            </a:r>
             <a:endParaRPr lang="en-US" dirty="0"/>
           </a:p>
         </p:txBody>
@@ -1789,10 +1511,6 @@
           <a:bodyPr/>
           <a:lstStyle/>
           <a:p>
-            <a:r>
-              <a:rPr lang="en-US" dirty="0"/>
-              <a:t/>
-            </a:r>
             <a:endParaRPr lang="en-US" dirty="0"/>
           </a:p>
         </p:txBody>
@@ -1877,10 +1595,6 @@
           <a:bodyPr/>
           <a:lstStyle/>
           <a:p>
-            <a:r>
-              <a:rPr lang="en-US" dirty="0"/>
-              <a:t/>
-            </a:r>
             <a:endParaRPr lang="en-US" dirty="0"/>
           </a:p>
         </p:txBody>
@@ -1954,6 +1668,11 @@
 <file path=ppt/slideMasters/slideMaster1.xml><?xml version="1.0" encoding="utf-8"?>
 <p:sldMaster xmlns:a="http://schemas.openxmlformats.org/drawingml/2006/main" xmlns:r="http://schemas.openxmlformats.org/officeDocument/2006/relationships" xmlns:p="http://schemas.openxmlformats.org/presentationml/2006/main">
   <p:cSld>
+    <p:bg>
+      <p:bgRef idx="1001">
+        <a:schemeClr val="bg1"/>
+      </p:bgRef>
+    </p:bg>
     <p:spTree>
       <p:nvGrpSpPr>
         <p:cNvPr id="1" name=""/>
@@ -2236,6 +1955,7 @@
         <a:solidFill>
           <a:srgbClr val="0F2138"/>
         </a:solidFill>
+        <a:effectLst/>
       </p:bgPr>
     </p:bg>
     <p:spTree>
@@ -2343,11 +2063,11 @@
           <a:bodyPr wrap="square" lIns="0" tIns="0" rIns="0" bIns="0" rtlCol="0" anchor="ctr"/>
           <a:lstStyle/>
           <a:p>
-            <a:pPr indent="0" marL="0">
-              <a:buNone/>
-            </a:pPr>
-            <a:r>
-              <a:rPr lang="en-US" sz="1500" b="1" spc="300" kern="0" dirty="0">
+            <a:pPr marL="0" indent="0">
+              <a:buNone/>
+            </a:pPr>
+            <a:r>
+              <a:rPr lang="en-US" sz="1500" b="1" kern="0" spc="300" dirty="0">
                 <a:solidFill>
                   <a:srgbClr val="02C39A"/>
                 </a:solidFill>
@@ -2382,7 +2102,7 @@
           <a:bodyPr wrap="square" lIns="0" tIns="0" rIns="0" bIns="0" rtlCol="0" anchor="ctr"/>
           <a:lstStyle/>
           <a:p>
-            <a:pPr indent="0" marL="0">
+            <a:pPr marL="0" indent="0">
               <a:lnSpc>
                 <a:spcPct val="95000"/>
               </a:lnSpc>
@@ -2402,7 +2122,7 @@
             <a:endParaRPr lang="en-US" sz="5000" dirty="0"/>
           </a:p>
           <a:p>
-            <a:pPr indent="0" marL="0">
+            <a:pPr marL="0" indent="0">
               <a:lnSpc>
                 <a:spcPct val="95000"/>
               </a:lnSpc>
@@ -2444,7 +2164,7 @@
           <a:bodyPr wrap="square" lIns="0" tIns="0" rIns="0" bIns="0" rtlCol="0" anchor="ctr"/>
           <a:lstStyle/>
           <a:p>
-            <a:pPr indent="0" marL="0">
+            <a:pPr marL="0" indent="0">
               <a:lnSpc>
                 <a:spcPct val="105000"/>
               </a:lnSpc>
@@ -2515,7 +2235,7 @@
           <a:bodyPr wrap="square" lIns="0" tIns="0" rIns="0" bIns="0" rtlCol="0" anchor="ctr"/>
           <a:lstStyle/>
           <a:p>
-            <a:pPr algn="ctr" indent="0" marL="0">
+            <a:pPr marL="0" indent="0" algn="ctr">
               <a:buNone/>
             </a:pPr>
             <a:r>
@@ -2583,7 +2303,7 @@
           <a:bodyPr wrap="square" lIns="0" tIns="0" rIns="0" bIns="0" rtlCol="0" anchor="ctr"/>
           <a:lstStyle/>
           <a:p>
-            <a:pPr algn="ctr" indent="0" marL="0">
+            <a:pPr marL="0" indent="0" algn="ctr">
               <a:buNone/>
             </a:pPr>
             <a:r>
@@ -2651,7 +2371,7 @@
           <a:bodyPr wrap="square" lIns="0" tIns="0" rIns="0" bIns="0" rtlCol="0" anchor="ctr"/>
           <a:lstStyle/>
           <a:p>
-            <a:pPr algn="ctr" indent="0" marL="0">
+            <a:pPr marL="0" indent="0" algn="ctr">
               <a:buNone/>
             </a:pPr>
             <a:r>
@@ -2690,7 +2410,7 @@
           <a:bodyPr wrap="square" lIns="0" tIns="0" rIns="0" bIns="0" rtlCol="0" anchor="ctr"/>
           <a:lstStyle/>
           <a:p>
-            <a:pPr indent="0" marL="0">
+            <a:pPr marL="0" indent="0">
               <a:buNone/>
             </a:pPr>
             <a:r>
@@ -2734,7 +2454,7 @@
             <a:prstDash val="solid"/>
           </a:ln>
           <a:effectLst>
-            <a:outerShdw sx="100000" sy="100000" kx="0" ky="0" algn="bl" rotWithShape="0" blurRad="101600" dist="38100" dir="5400000">
+            <a:outerShdw blurRad="101600" dist="38100" dir="5400000" algn="bl" rotWithShape="0">
               <a:srgbClr val="8AA0B8">
                 <a:alpha val="35000"/>
               </a:srgbClr>
@@ -2824,22 +2544,22 @@
       </p:sp>
       <p:pic>
         <p:nvPicPr>
-          <p:cNvPr id="20" name="Image 0" descr="C:/Users/User/AppData/Local/Temp/claude/C--Users-User/ea6a698a-948e-482c-86db-1b1488ae8d08/scratchpad/shots/jobs.png">    </p:cNvPr>
+          <p:cNvPr id="20" name="Image 0" descr="C:/Users/User/AppData/Local/Temp/claude/C--Users-User/ea6a698a-948e-482c-86db-1b1488ae8d08/scratchpad/shots/jobs.png"/>
           <p:cNvPicPr>
             <a:picLocks noChangeAspect="1"/>
           </p:cNvPicPr>
           <p:nvPr/>
         </p:nvPicPr>
         <p:blipFill>
-          <a:blip r:embed="rId1"/>
+          <a:blip r:embed="rId3"/>
           <a:stretch>
             <a:fillRect/>
           </a:stretch>
         </p:blipFill>
         <p:spPr>
           <a:xfrm>
-            <a:off x="7388352" y="1837944"/>
-            <a:ext cx="4288536" cy="2814352"/>
+            <a:off x="7388352" y="1865376"/>
+            <a:ext cx="4288536" cy="2786920"/>
           </a:xfrm>
           <a:prstGeom prst="rect">
             <a:avLst/>
@@ -2867,7 +2587,7 @@
           <a:bodyPr wrap="square" lIns="0" tIns="0" rIns="0" bIns="0" rtlCol="0" anchor="t"/>
           <a:lstStyle/>
           <a:p>
-            <a:pPr algn="ctr" indent="0" marL="0">
+            <a:pPr marL="0" indent="0" algn="ctr">
               <a:lnSpc>
                 <a:spcPct val="100000"/>
               </a:lnSpc>
@@ -2904,6 +2624,7 @@
         <a:solidFill>
           <a:srgbClr val="FFFFFF"/>
         </a:solidFill>
+        <a:effectLst/>
       </p:bgPr>
     </p:bg>
     <p:spTree>
@@ -2941,11 +2662,11 @@
           <a:bodyPr wrap="square" lIns="0" tIns="0" rIns="0" bIns="0" rtlCol="0" anchor="ctr"/>
           <a:lstStyle/>
           <a:p>
-            <a:pPr indent="0" marL="0">
-              <a:buNone/>
-            </a:pPr>
-            <a:r>
-              <a:rPr lang="en-US" sz="1200" b="1" spc="200" kern="0" dirty="0">
+            <a:pPr marL="0" indent="0">
+              <a:buNone/>
+            </a:pPr>
+            <a:r>
+              <a:rPr lang="en-US" sz="1200" b="1" kern="0" spc="200" dirty="0">
                 <a:solidFill>
                   <a:srgbClr val="02C39A"/>
                 </a:solidFill>
@@ -2980,7 +2701,7 @@
           <a:bodyPr wrap="square" lIns="0" tIns="0" rIns="0" bIns="0" rtlCol="0" anchor="ctr"/>
           <a:lstStyle/>
           <a:p>
-            <a:pPr indent="0" marL="0">
+            <a:pPr marL="0" indent="0">
               <a:buNone/>
             </a:pPr>
             <a:r>
@@ -3019,7 +2740,7 @@
           <a:bodyPr wrap="square" lIns="0" tIns="0" rIns="0" bIns="0" rtlCol="0" anchor="ctr"/>
           <a:lstStyle/>
           <a:p>
-            <a:pPr indent="0" marL="0">
+            <a:pPr marL="0" indent="0">
               <a:buNone/>
             </a:pPr>
             <a:r>
@@ -3058,7 +2779,7 @@
           </a:solidFill>
           <a:ln/>
           <a:effectLst>
-            <a:outerShdw sx="100000" sy="100000" kx="0" ky="0" algn="bl" rotWithShape="0" blurRad="101600" dist="38100" dir="5400000">
+            <a:outerShdw blurRad="101600" dist="38100" dir="5400000" algn="bl" rotWithShape="0">
               <a:srgbClr val="8AA0B8">
                 <a:alpha val="35000"/>
               </a:srgbClr>
@@ -3107,7 +2828,7 @@
           <a:bodyPr wrap="square" lIns="0" tIns="0" rIns="0" bIns="0" rtlCol="0" anchor="ctr"/>
           <a:lstStyle/>
           <a:p>
-            <a:pPr algn="ctr" indent="0" marL="0">
+            <a:pPr marL="0" indent="0" algn="ctr">
               <a:buNone/>
             </a:pPr>
             <a:r>
@@ -3146,7 +2867,7 @@
           <a:bodyPr wrap="square" lIns="0" tIns="0" rIns="0" bIns="0" rtlCol="0" anchor="ctr"/>
           <a:lstStyle/>
           <a:p>
-            <a:pPr indent="0" marL="0">
+            <a:pPr marL="0" indent="0">
               <a:buNone/>
             </a:pPr>
             <a:r>
@@ -3185,7 +2906,7 @@
           <a:bodyPr wrap="square" lIns="0" tIns="0" rIns="0" bIns="0" rtlCol="0" anchor="ctr"/>
           <a:lstStyle/>
           <a:p>
-            <a:pPr indent="0" marL="0">
+            <a:pPr marL="0" indent="0">
               <a:buNone/>
             </a:pPr>
             <a:r>
@@ -3224,7 +2945,7 @@
           </a:solidFill>
           <a:ln/>
           <a:effectLst>
-            <a:outerShdw sx="100000" sy="100000" kx="0" ky="0" algn="bl" rotWithShape="0" blurRad="101600" dist="38100" dir="5400000">
+            <a:outerShdw blurRad="101600" dist="38100" dir="5400000" algn="bl" rotWithShape="0">
               <a:srgbClr val="8AA0B8">
                 <a:alpha val="35000"/>
               </a:srgbClr>
@@ -3273,7 +2994,7 @@
           <a:bodyPr wrap="square" lIns="0" tIns="0" rIns="0" bIns="0" rtlCol="0" anchor="ctr"/>
           <a:lstStyle/>
           <a:p>
-            <a:pPr algn="ctr" indent="0" marL="0">
+            <a:pPr marL="0" indent="0" algn="ctr">
               <a:buNone/>
             </a:pPr>
             <a:r>
@@ -3312,7 +3033,7 @@
           <a:bodyPr wrap="square" lIns="0" tIns="0" rIns="0" bIns="0" rtlCol="0" anchor="ctr"/>
           <a:lstStyle/>
           <a:p>
-            <a:pPr indent="0" marL="0">
+            <a:pPr marL="0" indent="0">
               <a:buNone/>
             </a:pPr>
             <a:r>
@@ -3351,7 +3072,7 @@
           <a:bodyPr wrap="square" lIns="0" tIns="0" rIns="0" bIns="0" rtlCol="0" anchor="ctr"/>
           <a:lstStyle/>
           <a:p>
-            <a:pPr indent="0" marL="0">
+            <a:pPr marL="0" indent="0">
               <a:buNone/>
             </a:pPr>
             <a:r>
@@ -3390,7 +3111,7 @@
           </a:solidFill>
           <a:ln/>
           <a:effectLst>
-            <a:outerShdw sx="100000" sy="100000" kx="0" ky="0" algn="bl" rotWithShape="0" blurRad="101600" dist="38100" dir="5400000">
+            <a:outerShdw blurRad="101600" dist="38100" dir="5400000" algn="bl" rotWithShape="0">
               <a:srgbClr val="8AA0B8">
                 <a:alpha val="35000"/>
               </a:srgbClr>
@@ -3439,7 +3160,7 @@
           <a:bodyPr wrap="square" lIns="0" tIns="0" rIns="0" bIns="0" rtlCol="0" anchor="ctr"/>
           <a:lstStyle/>
           <a:p>
-            <a:pPr algn="ctr" indent="0" marL="0">
+            <a:pPr marL="0" indent="0" algn="ctr">
               <a:buNone/>
             </a:pPr>
             <a:r>
@@ -3478,7 +3199,7 @@
           <a:bodyPr wrap="square" lIns="0" tIns="0" rIns="0" bIns="0" rtlCol="0" anchor="ctr"/>
           <a:lstStyle/>
           <a:p>
-            <a:pPr indent="0" marL="0">
+            <a:pPr marL="0" indent="0">
               <a:buNone/>
             </a:pPr>
             <a:r>
@@ -3517,7 +3238,7 @@
           <a:bodyPr wrap="square" lIns="0" tIns="0" rIns="0" bIns="0" rtlCol="0" anchor="ctr"/>
           <a:lstStyle/>
           <a:p>
-            <a:pPr indent="0" marL="0">
+            <a:pPr marL="0" indent="0">
               <a:buNone/>
             </a:pPr>
             <a:r>
@@ -3556,7 +3277,7 @@
           </a:solidFill>
           <a:ln/>
           <a:effectLst>
-            <a:outerShdw sx="100000" sy="100000" kx="0" ky="0" algn="bl" rotWithShape="0" blurRad="101600" dist="38100" dir="5400000">
+            <a:outerShdw blurRad="101600" dist="38100" dir="5400000" algn="bl" rotWithShape="0">
               <a:srgbClr val="8AA0B8">
                 <a:alpha val="35000"/>
               </a:srgbClr>
@@ -3605,7 +3326,7 @@
           <a:bodyPr wrap="square" lIns="0" tIns="0" rIns="0" bIns="0" rtlCol="0" anchor="ctr"/>
           <a:lstStyle/>
           <a:p>
-            <a:pPr algn="ctr" indent="0" marL="0">
+            <a:pPr marL="0" indent="0" algn="ctr">
               <a:buNone/>
             </a:pPr>
             <a:r>
@@ -3644,7 +3365,7 @@
           <a:bodyPr wrap="square" lIns="0" tIns="0" rIns="0" bIns="0" rtlCol="0" anchor="ctr"/>
           <a:lstStyle/>
           <a:p>
-            <a:pPr indent="0" marL="0">
+            <a:pPr marL="0" indent="0">
               <a:buNone/>
             </a:pPr>
             <a:r>
@@ -3683,7 +3404,7 @@
           <a:bodyPr wrap="square" lIns="0" tIns="0" rIns="0" bIns="0" rtlCol="0" anchor="ctr"/>
           <a:lstStyle/>
           <a:p>
-            <a:pPr indent="0" marL="0">
+            <a:pPr marL="0" indent="0">
               <a:buNone/>
             </a:pPr>
             <a:r>
@@ -3724,7 +3445,7 @@
           <a:bodyPr wrap="square" rtlCol="0" anchor="ctr"/>
           <a:lstStyle/>
           <a:p>
-            <a:pPr algn="l" indent="0" marL="0">
+            <a:pPr marL="0" indent="0" algn="l">
               <a:buNone/>
             </a:pPr>
             <a:r>
@@ -3738,9 +3459,6 @@
               </a:rPr>
               <a:t>Expected result:  </a:t>
             </a:r>
-            <a:pPr algn="l" indent="0" marL="0">
-              <a:buNone/>
-            </a:pPr>
             <a:r>
               <a:rPr lang="en-US" sz="1500" dirty="0">
                 <a:solidFill>
@@ -3777,7 +3495,7 @@
           <a:bodyPr wrap="square" lIns="0" tIns="0" rIns="0" bIns="0" rtlCol="0" anchor="ctr"/>
           <a:lstStyle/>
           <a:p>
-            <a:pPr algn="r" indent="0" marL="0">
+            <a:pPr marL="0" indent="0" algn="r">
               <a:buNone/>
             </a:pPr>
             <a:r>
@@ -3811,6 +3529,7 @@
         <a:solidFill>
           <a:srgbClr val="FFFFFF"/>
         </a:solidFill>
+        <a:effectLst/>
       </p:bgPr>
     </p:bg>
     <p:spTree>
@@ -3848,11 +3567,11 @@
           <a:bodyPr wrap="square" lIns="0" tIns="0" rIns="0" bIns="0" rtlCol="0" anchor="ctr"/>
           <a:lstStyle/>
           <a:p>
-            <a:pPr indent="0" marL="0">
-              <a:buNone/>
-            </a:pPr>
-            <a:r>
-              <a:rPr lang="en-US" sz="1200" b="1" spc="200" kern="0" dirty="0">
+            <a:pPr marL="0" indent="0">
+              <a:buNone/>
+            </a:pPr>
+            <a:r>
+              <a:rPr lang="en-US" sz="1200" b="1" kern="0" spc="200" dirty="0">
                 <a:solidFill>
                   <a:srgbClr val="02C39A"/>
                 </a:solidFill>
@@ -3887,7 +3606,7 @@
           <a:bodyPr wrap="square" lIns="0" tIns="0" rIns="0" bIns="0" rtlCol="0" anchor="ctr"/>
           <a:lstStyle/>
           <a:p>
-            <a:pPr indent="0" marL="0">
+            <a:pPr marL="0" indent="0">
               <a:buNone/>
             </a:pPr>
             <a:r>
@@ -3926,7 +3645,7 @@
           <a:bodyPr wrap="square" lIns="0" tIns="0" rIns="0" bIns="0" rtlCol="0" anchor="ctr"/>
           <a:lstStyle/>
           <a:p>
-            <a:pPr indent="0" marL="0">
+            <a:pPr marL="0" indent="0">
               <a:buNone/>
             </a:pPr>
             <a:r>
@@ -3965,7 +3684,7 @@
           <a:bodyPr wrap="square" lIns="0" tIns="0" rIns="0" bIns="0" rtlCol="0" anchor="ctr"/>
           <a:lstStyle/>
           <a:p>
-            <a:pPr indent="0" marL="0">
+            <a:pPr marL="0" indent="0">
               <a:buNone/>
             </a:pPr>
             <a:r>
@@ -4026,7 +3745,7 @@
           <a:bodyPr wrap="square" lIns="0" tIns="0" rIns="0" bIns="0" rtlCol="0" anchor="ctr"/>
           <a:lstStyle/>
           <a:p>
-            <a:pPr indent="0" marL="0">
+            <a:pPr marL="0" indent="0">
               <a:buNone/>
             </a:pPr>
             <a:r>
@@ -4065,7 +3784,7 @@
           <a:bodyPr wrap="square" lIns="0" tIns="0" rIns="0" bIns="0" rtlCol="0" anchor="ctr"/>
           <a:lstStyle/>
           <a:p>
-            <a:pPr indent="0" marL="0">
+            <a:pPr marL="0" indent="0">
               <a:buNone/>
             </a:pPr>
             <a:r>
@@ -4128,7 +3847,7 @@
           <a:bodyPr wrap="square" lIns="0" tIns="0" rIns="0" bIns="0" rtlCol="0" anchor="ctr"/>
           <a:lstStyle/>
           <a:p>
-            <a:pPr indent="0" marL="0">
+            <a:pPr marL="0" indent="0">
               <a:buNone/>
             </a:pPr>
             <a:r>
@@ -4167,7 +3886,7 @@
           <a:bodyPr wrap="square" lIns="0" tIns="0" rIns="0" bIns="0" rtlCol="0" anchor="ctr"/>
           <a:lstStyle/>
           <a:p>
-            <a:pPr indent="0" marL="0">
+            <a:pPr marL="0" indent="0">
               <a:buNone/>
             </a:pPr>
             <a:r>
@@ -4230,7 +3949,7 @@
           <a:bodyPr wrap="square" lIns="0" tIns="0" rIns="0" bIns="0" rtlCol="0" anchor="ctr"/>
           <a:lstStyle/>
           <a:p>
-            <a:pPr indent="0" marL="0">
+            <a:pPr marL="0" indent="0">
               <a:buNone/>
             </a:pPr>
             <a:r>
@@ -4269,7 +3988,7 @@
           <a:bodyPr wrap="square" lIns="0" tIns="0" rIns="0" bIns="0" rtlCol="0" anchor="ctr"/>
           <a:lstStyle/>
           <a:p>
-            <a:pPr indent="0" marL="0">
+            <a:pPr marL="0" indent="0">
               <a:buNone/>
             </a:pPr>
             <a:r>
@@ -4332,7 +4051,7 @@
           <a:bodyPr wrap="square" lIns="0" tIns="0" rIns="0" bIns="0" rtlCol="0" anchor="ctr"/>
           <a:lstStyle/>
           <a:p>
-            <a:pPr indent="0" marL="0">
+            <a:pPr marL="0" indent="0">
               <a:buNone/>
             </a:pPr>
             <a:r>
@@ -4371,7 +4090,7 @@
           </a:solidFill>
           <a:ln/>
           <a:effectLst>
-            <a:outerShdw sx="100000" sy="100000" kx="0" ky="0" algn="bl" rotWithShape="0" blurRad="101600" dist="38100" dir="5400000">
+            <a:outerShdw blurRad="101600" dist="38100" dir="5400000" algn="bl" rotWithShape="0">
               <a:srgbClr val="8AA0B8">
                 <a:alpha val="35000"/>
               </a:srgbClr>
@@ -4400,7 +4119,7 @@
           <a:bodyPr wrap="square" lIns="0" tIns="0" rIns="0" bIns="0" rtlCol="0" anchor="ctr"/>
           <a:lstStyle/>
           <a:p>
-            <a:pPr indent="0" marL="0">
+            <a:pPr marL="0" indent="0">
               <a:buNone/>
             </a:pPr>
             <a:r>
@@ -4439,7 +4158,7 @@
           <a:bodyPr wrap="square" lIns="0" tIns="0" rIns="0" bIns="0" rtlCol="0" anchor="ctr"/>
           <a:lstStyle/>
           <a:p>
-            <a:pPr indent="0" marL="0">
+            <a:pPr marL="0" indent="0">
               <a:buNone/>
             </a:pPr>
             <a:r>
@@ -4501,7 +4220,7 @@
           <a:bodyPr wrap="square" lIns="0" tIns="0" rIns="0" bIns="0" rtlCol="0" anchor="ctr"/>
           <a:lstStyle/>
           <a:p>
-            <a:pPr indent="0" marL="0">
+            <a:pPr marL="0" indent="0">
               <a:buNone/>
             </a:pPr>
             <a:r>
@@ -4540,7 +4259,7 @@
           <a:bodyPr wrap="square" lIns="0" tIns="0" rIns="0" bIns="0" rtlCol="0" anchor="ctr"/>
           <a:lstStyle/>
           <a:p>
-            <a:pPr indent="0" marL="0">
+            <a:pPr marL="0" indent="0">
               <a:buNone/>
             </a:pPr>
             <a:r>
@@ -4602,7 +4321,7 @@
           <a:bodyPr wrap="square" lIns="0" tIns="0" rIns="0" bIns="0" rtlCol="0" anchor="ctr"/>
           <a:lstStyle/>
           <a:p>
-            <a:pPr indent="0" marL="0">
+            <a:pPr marL="0" indent="0">
               <a:buNone/>
             </a:pPr>
             <a:r>
@@ -4641,7 +4360,7 @@
           <a:bodyPr wrap="square" lIns="0" tIns="0" rIns="0" bIns="0" rtlCol="0" anchor="ctr"/>
           <a:lstStyle/>
           <a:p>
-            <a:pPr indent="0" marL="0">
+            <a:pPr marL="0" indent="0">
               <a:buNone/>
             </a:pPr>
             <a:r>
@@ -4680,7 +4399,7 @@
           <a:bodyPr wrap="square" lIns="0" tIns="0" rIns="0" bIns="0" rtlCol="0" anchor="ctr"/>
           <a:lstStyle/>
           <a:p>
-            <a:pPr indent="0" marL="0">
+            <a:pPr marL="0" indent="0">
               <a:buNone/>
             </a:pPr>
             <a:r>
@@ -4719,7 +4438,7 @@
           <a:bodyPr wrap="square" lIns="0" tIns="0" rIns="0" bIns="0" rtlCol="0" anchor="ctr"/>
           <a:lstStyle/>
           <a:p>
-            <a:pPr algn="r" indent="0" marL="0">
+            <a:pPr marL="0" indent="0" algn="r">
               <a:buNone/>
             </a:pPr>
             <a:r>
@@ -4753,6 +4472,7 @@
         <a:solidFill>
           <a:srgbClr val="FFFFFF"/>
         </a:solidFill>
+        <a:effectLst/>
       </p:bgPr>
     </p:bg>
     <p:spTree>
@@ -4790,11 +4510,11 @@
           <a:bodyPr wrap="square" lIns="0" tIns="0" rIns="0" bIns="0" rtlCol="0" anchor="ctr"/>
           <a:lstStyle/>
           <a:p>
-            <a:pPr indent="0" marL="0">
-              <a:buNone/>
-            </a:pPr>
-            <a:r>
-              <a:rPr lang="en-US" sz="1200" b="1" spc="200" kern="0" dirty="0">
+            <a:pPr marL="0" indent="0">
+              <a:buNone/>
+            </a:pPr>
+            <a:r>
+              <a:rPr lang="en-US" sz="1200" b="1" kern="0" spc="200" dirty="0">
                 <a:solidFill>
                   <a:srgbClr val="02C39A"/>
                 </a:solidFill>
@@ -4829,7 +4549,7 @@
           <a:bodyPr wrap="square" lIns="0" tIns="0" rIns="0" bIns="0" rtlCol="0" anchor="ctr"/>
           <a:lstStyle/>
           <a:p>
-            <a:pPr indent="0" marL="0">
+            <a:pPr marL="0" indent="0">
               <a:buNone/>
             </a:pPr>
             <a:r>
@@ -4868,7 +4588,7 @@
           </a:solidFill>
           <a:ln/>
           <a:effectLst>
-            <a:outerShdw sx="100000" sy="100000" kx="0" ky="0" algn="bl" rotWithShape="0" blurRad="101600" dist="38100" dir="5400000">
+            <a:outerShdw blurRad="101600" dist="38100" dir="5400000" algn="bl" rotWithShape="0">
               <a:srgbClr val="8AA0B8">
                 <a:alpha val="35000"/>
               </a:srgbClr>
@@ -4919,7 +4639,7 @@
           <a:bodyPr wrap="square" lIns="0" tIns="0" rIns="0" bIns="0" rtlCol="0" anchor="ctr"/>
           <a:lstStyle/>
           <a:p>
-            <a:pPr algn="ctr" indent="0" marL="0">
+            <a:pPr marL="0" indent="0" algn="ctr">
               <a:buNone/>
             </a:pPr>
             <a:r>
@@ -5085,7 +4805,7 @@
           </a:solidFill>
           <a:ln/>
           <a:effectLst>
-            <a:outerShdw sx="100000" sy="100000" kx="0" ky="0" algn="bl" rotWithShape="0" blurRad="101600" dist="38100" dir="5400000">
+            <a:outerShdw blurRad="101600" dist="38100" dir="5400000" algn="bl" rotWithShape="0">
               <a:srgbClr val="8AA0B8">
                 <a:alpha val="35000"/>
               </a:srgbClr>
@@ -5136,7 +4856,7 @@
           <a:bodyPr wrap="square" lIns="0" tIns="0" rIns="0" bIns="0" rtlCol="0" anchor="ctr"/>
           <a:lstStyle/>
           <a:p>
-            <a:pPr algn="ctr" indent="0" marL="0">
+            <a:pPr marL="0" indent="0" algn="ctr">
               <a:buNone/>
             </a:pPr>
             <a:r>
@@ -5302,7 +5022,7 @@
           </a:solidFill>
           <a:ln/>
           <a:effectLst>
-            <a:outerShdw sx="100000" sy="100000" kx="0" ky="0" algn="bl" rotWithShape="0" blurRad="101600" dist="38100" dir="5400000">
+            <a:outerShdw blurRad="101600" dist="38100" dir="5400000" algn="bl" rotWithShape="0">
               <a:srgbClr val="8AA0B8">
                 <a:alpha val="35000"/>
               </a:srgbClr>
@@ -5355,7 +5075,7 @@
           <a:bodyPr wrap="square" lIns="0" tIns="0" rIns="0" bIns="0" rtlCol="0" anchor="ctr"/>
           <a:lstStyle/>
           <a:p>
-            <a:pPr algn="ctr" indent="0" marL="0">
+            <a:pPr marL="0" indent="0" algn="ctr">
               <a:buNone/>
             </a:pPr>
             <a:r>
@@ -5479,7 +5199,7 @@
           <a:bodyPr wrap="square" lIns="0" tIns="0" rIns="0" bIns="0" rtlCol="0" anchor="ctr"/>
           <a:lstStyle/>
           <a:p>
-            <a:pPr algn="r" indent="0" marL="0">
+            <a:pPr marL="0" indent="0" algn="r">
               <a:buNone/>
             </a:pPr>
             <a:r>
@@ -5513,6 +5233,7 @@
         <a:solidFill>
           <a:srgbClr val="0F2138"/>
         </a:solidFill>
+        <a:effectLst/>
       </p:bgPr>
     </p:bg>
     <p:spTree>
@@ -5620,11 +5341,11 @@
           <a:bodyPr wrap="square" lIns="0" tIns="0" rIns="0" bIns="0" rtlCol="0" anchor="ctr"/>
           <a:lstStyle/>
           <a:p>
-            <a:pPr indent="0" marL="0">
-              <a:buNone/>
-            </a:pPr>
-            <a:r>
-              <a:rPr lang="en-US" sz="1400" b="1" spc="300" kern="0" dirty="0">
+            <a:pPr marL="0" indent="0">
+              <a:buNone/>
+            </a:pPr>
+            <a:r>
+              <a:rPr lang="en-US" sz="1400" b="1" kern="0" spc="300" dirty="0">
                 <a:solidFill>
                   <a:srgbClr val="02C39A"/>
                 </a:solidFill>
@@ -5659,7 +5380,7 @@
           <a:bodyPr wrap="square" lIns="0" tIns="0" rIns="0" bIns="0" rtlCol="0" anchor="ctr"/>
           <a:lstStyle/>
           <a:p>
-            <a:pPr indent="0" marL="0">
+            <a:pPr marL="0" indent="0">
               <a:lnSpc>
                 <a:spcPct val="105000"/>
               </a:lnSpc>
@@ -5701,7 +5422,7 @@
           <a:bodyPr wrap="square" lIns="0" tIns="0" rIns="0" bIns="0" rtlCol="0" anchor="ctr"/>
           <a:lstStyle/>
           <a:p>
-            <a:pPr indent="0" marL="0">
+            <a:pPr marL="0" indent="0">
               <a:buNone/>
             </a:pPr>
             <a:r>
@@ -5762,7 +5483,7 @@
           <a:bodyPr wrap="square" lIns="0" tIns="0" rIns="0" bIns="0" rtlCol="0" anchor="ctr"/>
           <a:lstStyle/>
           <a:p>
-            <a:pPr algn="ctr" indent="0" marL="0">
+            <a:pPr marL="0" indent="0" algn="ctr">
               <a:buNone/>
             </a:pPr>
             <a:r>
@@ -5796,6 +5517,7 @@
         <a:solidFill>
           <a:srgbClr val="FFFFFF"/>
         </a:solidFill>
+        <a:effectLst/>
       </p:bgPr>
     </p:bg>
     <p:spTree>
@@ -5833,11 +5555,11 @@
           <a:bodyPr wrap="square" lIns="0" tIns="0" rIns="0" bIns="0" rtlCol="0" anchor="ctr"/>
           <a:lstStyle/>
           <a:p>
-            <a:pPr indent="0" marL="0">
-              <a:buNone/>
-            </a:pPr>
-            <a:r>
-              <a:rPr lang="en-US" sz="1200" b="1" spc="200" kern="0" dirty="0">
+            <a:pPr marL="0" indent="0">
+              <a:buNone/>
+            </a:pPr>
+            <a:r>
+              <a:rPr lang="en-US" sz="1200" b="1" kern="0" spc="200" dirty="0">
                 <a:solidFill>
                   <a:srgbClr val="02C39A"/>
                 </a:solidFill>
@@ -5872,7 +5594,7 @@
           <a:bodyPr wrap="square" lIns="0" tIns="0" rIns="0" bIns="0" rtlCol="0" anchor="ctr"/>
           <a:lstStyle/>
           <a:p>
-            <a:pPr indent="0" marL="0">
+            <a:pPr marL="0" indent="0">
               <a:buNone/>
             </a:pPr>
             <a:r>
@@ -5911,7 +5633,7 @@
           </a:solidFill>
           <a:ln/>
           <a:effectLst>
-            <a:outerShdw sx="100000" sy="100000" kx="0" ky="0" algn="bl" rotWithShape="0" blurRad="101600" dist="38100" dir="5400000">
+            <a:outerShdw blurRad="101600" dist="38100" dir="5400000" algn="bl" rotWithShape="0">
               <a:srgbClr val="8AA0B8">
                 <a:alpha val="35000"/>
               </a:srgbClr>
@@ -5964,7 +5686,7 @@
           <a:bodyPr wrap="square" lIns="0" tIns="0" rIns="0" bIns="0" rtlCol="0" anchor="ctr"/>
           <a:lstStyle/>
           <a:p>
-            <a:pPr algn="ctr" indent="0" marL="0">
+            <a:pPr marL="0" indent="0" algn="ctr">
               <a:buNone/>
             </a:pPr>
             <a:r>
@@ -6003,7 +5725,7 @@
           <a:bodyPr wrap="square" lIns="0" tIns="0" rIns="0" bIns="0" rtlCol="0" anchor="ctr"/>
           <a:lstStyle/>
           <a:p>
-            <a:pPr indent="0" marL="0">
+            <a:pPr marL="0" indent="0">
               <a:buNone/>
             </a:pPr>
             <a:r>
@@ -6127,7 +5849,7 @@
           </a:solidFill>
           <a:ln/>
           <a:effectLst>
-            <a:outerShdw sx="100000" sy="100000" kx="0" ky="0" algn="bl" rotWithShape="0" blurRad="101600" dist="38100" dir="5400000">
+            <a:outerShdw blurRad="101600" dist="38100" dir="5400000" algn="bl" rotWithShape="0">
               <a:srgbClr val="8AA0B8">
                 <a:alpha val="35000"/>
               </a:srgbClr>
@@ -6180,7 +5902,7 @@
           <a:bodyPr wrap="square" lIns="0" tIns="0" rIns="0" bIns="0" rtlCol="0" anchor="ctr"/>
           <a:lstStyle/>
           <a:p>
-            <a:pPr algn="ctr" indent="0" marL="0">
+            <a:pPr marL="0" indent="0" algn="ctr">
               <a:buNone/>
             </a:pPr>
             <a:r>
@@ -6219,7 +5941,7 @@
           <a:bodyPr wrap="square" lIns="0" tIns="0" rIns="0" bIns="0" rtlCol="0" anchor="ctr"/>
           <a:lstStyle/>
           <a:p>
-            <a:pPr indent="0" marL="0">
+            <a:pPr marL="0" indent="0">
               <a:buNone/>
             </a:pPr>
             <a:r>
@@ -6343,7 +6065,7 @@
           <a:bodyPr wrap="square" lIns="0" tIns="0" rIns="0" bIns="0" rtlCol="0" anchor="ctr"/>
           <a:lstStyle/>
           <a:p>
-            <a:pPr algn="r" indent="0" marL="0">
+            <a:pPr marL="0" indent="0" algn="r">
               <a:buNone/>
             </a:pPr>
             <a:r>
@@ -6377,6 +6099,7 @@
         <a:solidFill>
           <a:srgbClr val="FFFFFF"/>
         </a:solidFill>
+        <a:effectLst/>
       </p:bgPr>
     </p:bg>
     <p:spTree>
@@ -6414,11 +6137,11 @@
           <a:bodyPr wrap="square" lIns="0" tIns="0" rIns="0" bIns="0" rtlCol="0" anchor="ctr"/>
           <a:lstStyle/>
           <a:p>
-            <a:pPr indent="0" marL="0">
-              <a:buNone/>
-            </a:pPr>
-            <a:r>
-              <a:rPr lang="en-US" sz="1200" b="1" spc="200" kern="0" dirty="0">
+            <a:pPr marL="0" indent="0">
+              <a:buNone/>
+            </a:pPr>
+            <a:r>
+              <a:rPr lang="en-US" sz="1200" b="1" kern="0" spc="200" dirty="0">
                 <a:solidFill>
                   <a:srgbClr val="02C39A"/>
                 </a:solidFill>
@@ -6453,7 +6176,7 @@
           <a:bodyPr wrap="square" lIns="0" tIns="0" rIns="0" bIns="0" rtlCol="0" anchor="ctr"/>
           <a:lstStyle/>
           <a:p>
-            <a:pPr indent="0" marL="0">
+            <a:pPr marL="0" indent="0">
               <a:buNone/>
             </a:pPr>
             <a:r>
@@ -6492,7 +6215,7 @@
           </a:solidFill>
           <a:ln/>
           <a:effectLst>
-            <a:outerShdw sx="100000" sy="100000" kx="0" ky="0" algn="bl" rotWithShape="0" blurRad="101600" dist="38100" dir="5400000">
+            <a:outerShdw blurRad="101600" dist="38100" dir="5400000" algn="bl" rotWithShape="0">
               <a:srgbClr val="8AA0B8">
                 <a:alpha val="35000"/>
               </a:srgbClr>
@@ -6541,7 +6264,7 @@
           <a:bodyPr wrap="square" lIns="0" tIns="0" rIns="0" bIns="0" rtlCol="0" anchor="ctr"/>
           <a:lstStyle/>
           <a:p>
-            <a:pPr algn="ctr" indent="0" marL="0">
+            <a:pPr marL="0" indent="0" algn="ctr">
               <a:buNone/>
             </a:pPr>
             <a:r>
@@ -6580,7 +6303,7 @@
           <a:bodyPr wrap="square" lIns="0" tIns="0" rIns="0" bIns="0" rtlCol="0" anchor="ctr"/>
           <a:lstStyle/>
           <a:p>
-            <a:pPr indent="0" marL="0">
+            <a:pPr marL="0" indent="0">
               <a:buNone/>
             </a:pPr>
             <a:r>
@@ -6725,7 +6448,7 @@
           </a:solidFill>
           <a:ln/>
           <a:effectLst>
-            <a:outerShdw sx="100000" sy="100000" kx="0" ky="0" algn="bl" rotWithShape="0" blurRad="101600" dist="38100" dir="5400000">
+            <a:outerShdw blurRad="101600" dist="38100" dir="5400000" algn="bl" rotWithShape="0">
               <a:srgbClr val="8AA0B8">
                 <a:alpha val="35000"/>
               </a:srgbClr>
@@ -6774,7 +6497,7 @@
           <a:bodyPr wrap="square" lIns="0" tIns="0" rIns="0" bIns="0" rtlCol="0" anchor="ctr"/>
           <a:lstStyle/>
           <a:p>
-            <a:pPr algn="ctr" indent="0" marL="0">
+            <a:pPr marL="0" indent="0" algn="ctr">
               <a:buNone/>
             </a:pPr>
             <a:r>
@@ -6813,7 +6536,7 @@
           <a:bodyPr wrap="square" lIns="0" tIns="0" rIns="0" bIns="0" rtlCol="0" anchor="ctr"/>
           <a:lstStyle/>
           <a:p>
-            <a:pPr indent="0" marL="0">
+            <a:pPr marL="0" indent="0">
               <a:buNone/>
             </a:pPr>
             <a:r>
@@ -6958,7 +6681,7 @@
           <a:bodyPr wrap="square" lIns="0" tIns="0" rIns="0" bIns="0" rtlCol="0" anchor="ctr"/>
           <a:lstStyle/>
           <a:p>
-            <a:pPr algn="r" indent="0" marL="0">
+            <a:pPr marL="0" indent="0" algn="r">
               <a:buNone/>
             </a:pPr>
             <a:r>
@@ -6992,6 +6715,7 @@
         <a:solidFill>
           <a:srgbClr val="FFFFFF"/>
         </a:solidFill>
+        <a:effectLst/>
       </p:bgPr>
     </p:bg>
     <p:spTree>
@@ -7029,11 +6753,11 @@
           <a:bodyPr wrap="square" lIns="0" tIns="0" rIns="0" bIns="0" rtlCol="0" anchor="ctr"/>
           <a:lstStyle/>
           <a:p>
-            <a:pPr indent="0" marL="0">
-              <a:buNone/>
-            </a:pPr>
-            <a:r>
-              <a:rPr lang="en-US" sz="1200" b="1" spc="200" kern="0" dirty="0">
+            <a:pPr marL="0" indent="0">
+              <a:buNone/>
+            </a:pPr>
+            <a:r>
+              <a:rPr lang="en-US" sz="1200" b="1" kern="0" spc="200" dirty="0">
                 <a:solidFill>
                   <a:srgbClr val="02C39A"/>
                 </a:solidFill>
@@ -7068,7 +6792,7 @@
           <a:bodyPr wrap="square" lIns="0" tIns="0" rIns="0" bIns="0" rtlCol="0" anchor="ctr"/>
           <a:lstStyle/>
           <a:p>
-            <a:pPr indent="0" marL="0">
+            <a:pPr marL="0" indent="0">
               <a:buNone/>
             </a:pPr>
             <a:r>
@@ -7107,7 +6831,7 @@
           </a:solidFill>
           <a:ln/>
           <a:effectLst>
-            <a:outerShdw sx="100000" sy="100000" kx="0" ky="0" algn="bl" rotWithShape="0" blurRad="101600" dist="38100" dir="5400000">
+            <a:outerShdw blurRad="101600" dist="38100" dir="5400000" algn="bl" rotWithShape="0">
               <a:srgbClr val="8AA0B8">
                 <a:alpha val="35000"/>
               </a:srgbClr>
@@ -7158,7 +6882,7 @@
           <a:bodyPr wrap="square" lIns="0" tIns="0" rIns="0" bIns="0" rtlCol="0" anchor="ctr"/>
           <a:lstStyle/>
           <a:p>
-            <a:pPr algn="ctr" indent="0" marL="0">
+            <a:pPr marL="0" indent="0" algn="ctr">
               <a:buNone/>
             </a:pPr>
             <a:r>
@@ -7197,7 +6921,7 @@
           <a:bodyPr wrap="square" lIns="0" tIns="0" rIns="0" bIns="0" rtlCol="0" anchor="ctr"/>
           <a:lstStyle/>
           <a:p>
-            <a:pPr indent="0" marL="0">
+            <a:pPr marL="0" indent="0">
               <a:buNone/>
             </a:pPr>
             <a:r>
@@ -7236,7 +6960,7 @@
           <a:bodyPr wrap="square" lIns="0" tIns="0" rIns="0" bIns="0" rtlCol="0" anchor="ctr"/>
           <a:lstStyle/>
           <a:p>
-            <a:pPr indent="0" marL="0">
+            <a:pPr marL="0" indent="0">
               <a:lnSpc>
                 <a:spcPct val="105000"/>
               </a:lnSpc>
@@ -7278,7 +7002,7 @@
           </a:solidFill>
           <a:ln/>
           <a:effectLst>
-            <a:outerShdw sx="100000" sy="100000" kx="0" ky="0" algn="bl" rotWithShape="0" blurRad="101600" dist="38100" dir="5400000">
+            <a:outerShdw blurRad="101600" dist="38100" dir="5400000" algn="bl" rotWithShape="0">
               <a:srgbClr val="8AA0B8">
                 <a:alpha val="35000"/>
               </a:srgbClr>
@@ -7329,7 +7053,7 @@
           <a:bodyPr wrap="square" lIns="0" tIns="0" rIns="0" bIns="0" rtlCol="0" anchor="ctr"/>
           <a:lstStyle/>
           <a:p>
-            <a:pPr algn="ctr" indent="0" marL="0">
+            <a:pPr marL="0" indent="0" algn="ctr">
               <a:buNone/>
             </a:pPr>
             <a:r>
@@ -7368,7 +7092,7 @@
           <a:bodyPr wrap="square" lIns="0" tIns="0" rIns="0" bIns="0" rtlCol="0" anchor="ctr"/>
           <a:lstStyle/>
           <a:p>
-            <a:pPr indent="0" marL="0">
+            <a:pPr marL="0" indent="0">
               <a:buNone/>
             </a:pPr>
             <a:r>
@@ -7407,7 +7131,7 @@
           <a:bodyPr wrap="square" lIns="0" tIns="0" rIns="0" bIns="0" rtlCol="0" anchor="ctr"/>
           <a:lstStyle/>
           <a:p>
-            <a:pPr indent="0" marL="0">
+            <a:pPr marL="0" indent="0">
               <a:lnSpc>
                 <a:spcPct val="105000"/>
               </a:lnSpc>
@@ -7449,7 +7173,7 @@
           </a:solidFill>
           <a:ln/>
           <a:effectLst>
-            <a:outerShdw sx="100000" sy="100000" kx="0" ky="0" algn="bl" rotWithShape="0" blurRad="101600" dist="38100" dir="5400000">
+            <a:outerShdw blurRad="101600" dist="38100" dir="5400000" algn="bl" rotWithShape="0">
               <a:srgbClr val="8AA0B8">
                 <a:alpha val="35000"/>
               </a:srgbClr>
@@ -7500,7 +7224,7 @@
           <a:bodyPr wrap="square" lIns="0" tIns="0" rIns="0" bIns="0" rtlCol="0" anchor="ctr"/>
           <a:lstStyle/>
           <a:p>
-            <a:pPr algn="ctr" indent="0" marL="0">
+            <a:pPr marL="0" indent="0" algn="ctr">
               <a:buNone/>
             </a:pPr>
             <a:r>
@@ -7539,7 +7263,7 @@
           <a:bodyPr wrap="square" lIns="0" tIns="0" rIns="0" bIns="0" rtlCol="0" anchor="ctr"/>
           <a:lstStyle/>
           <a:p>
-            <a:pPr indent="0" marL="0">
+            <a:pPr marL="0" indent="0">
               <a:buNone/>
             </a:pPr>
             <a:r>
@@ -7578,7 +7302,7 @@
           <a:bodyPr wrap="square" lIns="0" tIns="0" rIns="0" bIns="0" rtlCol="0" anchor="ctr"/>
           <a:lstStyle/>
           <a:p>
-            <a:pPr indent="0" marL="0">
+            <a:pPr marL="0" indent="0">
               <a:lnSpc>
                 <a:spcPct val="105000"/>
               </a:lnSpc>
@@ -7620,7 +7344,7 @@
           <a:bodyPr wrap="square" lIns="0" tIns="0" rIns="0" bIns="0" rtlCol="0" anchor="ctr"/>
           <a:lstStyle/>
           <a:p>
-            <a:pPr algn="r" indent="0" marL="0">
+            <a:pPr marL="0" indent="0" algn="r">
               <a:buNone/>
             </a:pPr>
             <a:r>
@@ -7654,6 +7378,7 @@
         <a:solidFill>
           <a:srgbClr val="FFFFFF"/>
         </a:solidFill>
+        <a:effectLst/>
       </p:bgPr>
     </p:bg>
     <p:spTree>
@@ -7691,11 +7416,11 @@
           <a:bodyPr wrap="square" lIns="0" tIns="0" rIns="0" bIns="0" rtlCol="0" anchor="ctr"/>
           <a:lstStyle/>
           <a:p>
-            <a:pPr indent="0" marL="0">
-              <a:buNone/>
-            </a:pPr>
-            <a:r>
-              <a:rPr lang="en-US" sz="1200" b="1" spc="200" kern="0" dirty="0">
+            <a:pPr marL="0" indent="0">
+              <a:buNone/>
+            </a:pPr>
+            <a:r>
+              <a:rPr lang="en-US" sz="1200" b="1" kern="0" spc="200" dirty="0">
                 <a:solidFill>
                   <a:srgbClr val="02C39A"/>
                 </a:solidFill>
@@ -7730,7 +7455,7 @@
           <a:bodyPr wrap="square" lIns="0" tIns="0" rIns="0" bIns="0" rtlCol="0" anchor="ctr"/>
           <a:lstStyle/>
           <a:p>
-            <a:pPr indent="0" marL="0">
+            <a:pPr marL="0" indent="0">
               <a:buNone/>
             </a:pPr>
             <a:r>
@@ -7742,8 +7467,13 @@
                 <a:ea typeface="Cambria" pitchFamily="34" charset="-122"/>
                 <a:cs typeface="Cambria" pitchFamily="34" charset="-120"/>
               </a:rPr>
-              <a:t>The app today — not a mockup</a:t>
-            </a:r>
+              <a:t>The app today </a:t>
+            </a:r>
+          </a:p>
+          <a:p>
+            <a:pPr marL="0" indent="0">
+              <a:buNone/>
+            </a:pPr>
             <a:endParaRPr lang="en-US" sz="3200" dirty="0"/>
           </a:p>
         </p:txBody>
@@ -7774,7 +7504,7 @@
             <a:prstDash val="solid"/>
           </a:ln>
           <a:effectLst>
-            <a:outerShdw sx="100000" sy="100000" kx="0" ky="0" algn="bl" rotWithShape="0" blurRad="101600" dist="38100" dir="5400000">
+            <a:outerShdw blurRad="101600" dist="38100" dir="5400000" algn="bl" rotWithShape="0">
               <a:srgbClr val="8AA0B8">
                 <a:alpha val="35000"/>
               </a:srgbClr>
@@ -7864,14 +7594,14 @@
       </p:sp>
       <p:pic>
         <p:nvPicPr>
-          <p:cNvPr id="9" name="Image 0" descr="C:/Users/User/AppData/Local/Temp/claude/C--Users-User/ea6a698a-948e-482c-86db-1b1488ae8d08/scratchpad/shots/tour/landing.png">    </p:cNvPr>
+          <p:cNvPr id="9" name="Image 0" descr="C:/Users/User/AppData/Local/Temp/claude/C--Users-User/ea6a698a-948e-482c-86db-1b1488ae8d08/scratchpad/shots/tour/landing.png"/>
           <p:cNvPicPr>
             <a:picLocks noChangeAspect="1"/>
           </p:cNvPicPr>
           <p:nvPr/>
         </p:nvPicPr>
         <p:blipFill>
-          <a:blip r:embed="rId1"/>
+          <a:blip r:embed="rId3"/>
           <a:stretch>
             <a:fillRect/>
           </a:stretch>
@@ -7907,7 +7637,7 @@
           <a:bodyPr wrap="square" lIns="0" tIns="0" rIns="0" bIns="0" rtlCol="0" anchor="t"/>
           <a:lstStyle/>
           <a:p>
-            <a:pPr algn="ctr" indent="0" marL="0">
+            <a:pPr marL="0" indent="0" algn="ctr">
               <a:lnSpc>
                 <a:spcPct val="100000"/>
               </a:lnSpc>
@@ -7954,7 +7684,7 @@
             <a:prstDash val="solid"/>
           </a:ln>
           <a:effectLst>
-            <a:outerShdw sx="100000" sy="100000" kx="0" ky="0" algn="bl" rotWithShape="0" blurRad="101600" dist="38100" dir="5400000">
+            <a:outerShdw blurRad="101600" dist="38100" dir="5400000" algn="bl" rotWithShape="0">
               <a:srgbClr val="8AA0B8">
                 <a:alpha val="35000"/>
               </a:srgbClr>
@@ -8044,14 +7774,14 @@
       </p:sp>
       <p:pic>
         <p:nvPicPr>
-          <p:cNvPr id="16" name="Image 1" descr="C:/Users/User/AppData/Local/Temp/claude/C--Users-User/ea6a698a-948e-482c-86db-1b1488ae8d08/scratchpad/shots/tour/jobs.png">    </p:cNvPr>
+          <p:cNvPr id="16" name="Image 1" descr="C:/Users/User/AppData/Local/Temp/claude/C--Users-User/ea6a698a-948e-482c-86db-1b1488ae8d08/scratchpad/shots/tour/jobs.png"/>
           <p:cNvPicPr>
             <a:picLocks noChangeAspect="1"/>
           </p:cNvPicPr>
           <p:nvPr/>
         </p:nvPicPr>
         <p:blipFill>
-          <a:blip r:embed="rId2"/>
+          <a:blip r:embed="rId4"/>
           <a:stretch>
             <a:fillRect/>
           </a:stretch>
@@ -8087,7 +7817,7 @@
           <a:bodyPr wrap="square" lIns="0" tIns="0" rIns="0" bIns="0" rtlCol="0" anchor="t"/>
           <a:lstStyle/>
           <a:p>
-            <a:pPr algn="ctr" indent="0" marL="0">
+            <a:pPr marL="0" indent="0" algn="ctr">
               <a:lnSpc>
                 <a:spcPct val="100000"/>
               </a:lnSpc>
@@ -8134,7 +7864,7 @@
             <a:prstDash val="solid"/>
           </a:ln>
           <a:effectLst>
-            <a:outerShdw sx="100000" sy="100000" kx="0" ky="0" algn="bl" rotWithShape="0" blurRad="101600" dist="38100" dir="5400000">
+            <a:outerShdw blurRad="101600" dist="38100" dir="5400000" algn="bl" rotWithShape="0">
               <a:srgbClr val="8AA0B8">
                 <a:alpha val="35000"/>
               </a:srgbClr>
@@ -8224,14 +7954,14 @@
       </p:sp>
       <p:pic>
         <p:nvPicPr>
-          <p:cNvPr id="23" name="Image 2" descr="C:/Users/User/AppData/Local/Temp/claude/C--Users-User/ea6a698a-948e-482c-86db-1b1488ae8d08/scratchpad/shots/tour/swipe.png">    </p:cNvPr>
+          <p:cNvPr id="23" name="Image 2" descr="C:/Users/User/AppData/Local/Temp/claude/C--Users-User/ea6a698a-948e-482c-86db-1b1488ae8d08/scratchpad/shots/tour/swipe.png"/>
           <p:cNvPicPr>
             <a:picLocks noChangeAspect="1"/>
           </p:cNvPicPr>
           <p:nvPr/>
         </p:nvPicPr>
         <p:blipFill>
-          <a:blip r:embed="rId3"/>
+          <a:blip r:embed="rId5"/>
           <a:stretch>
             <a:fillRect/>
           </a:stretch>
@@ -8267,7 +7997,7 @@
           <a:bodyPr wrap="square" lIns="0" tIns="0" rIns="0" bIns="0" rtlCol="0" anchor="t"/>
           <a:lstStyle/>
           <a:p>
-            <a:pPr algn="ctr" indent="0" marL="0">
+            <a:pPr marL="0" indent="0" algn="ctr">
               <a:lnSpc>
                 <a:spcPct val="100000"/>
               </a:lnSpc>
@@ -8314,7 +8044,7 @@
             <a:prstDash val="solid"/>
           </a:ln>
           <a:effectLst>
-            <a:outerShdw sx="100000" sy="100000" kx="0" ky="0" algn="bl" rotWithShape="0" blurRad="101600" dist="38100" dir="5400000">
+            <a:outerShdw blurRad="101600" dist="38100" dir="5400000" algn="bl" rotWithShape="0">
               <a:srgbClr val="8AA0B8">
                 <a:alpha val="35000"/>
               </a:srgbClr>
@@ -8404,14 +8134,14 @@
       </p:sp>
       <p:pic>
         <p:nvPicPr>
-          <p:cNvPr id="30" name="Image 3" descr="C:/Users/User/AppData/Local/Temp/claude/C--Users-User/ea6a698a-948e-482c-86db-1b1488ae8d08/scratchpad/shots/tour/cvbuilder.png">    </p:cNvPr>
+          <p:cNvPr id="30" name="Image 3" descr="C:/Users/User/AppData/Local/Temp/claude/C--Users-User/ea6a698a-948e-482c-86db-1b1488ae8d08/scratchpad/shots/tour/cvbuilder.png"/>
           <p:cNvPicPr>
             <a:picLocks noChangeAspect="1"/>
           </p:cNvPicPr>
           <p:nvPr/>
         </p:nvPicPr>
         <p:blipFill>
-          <a:blip r:embed="rId4"/>
+          <a:blip r:embed="rId6"/>
           <a:stretch>
             <a:fillRect/>
           </a:stretch>
@@ -8447,7 +8177,7 @@
           <a:bodyPr wrap="square" lIns="0" tIns="0" rIns="0" bIns="0" rtlCol="0" anchor="t"/>
           <a:lstStyle/>
           <a:p>
-            <a:pPr algn="ctr" indent="0" marL="0">
+            <a:pPr marL="0" indent="0" algn="ctr">
               <a:lnSpc>
                 <a:spcPct val="100000"/>
               </a:lnSpc>
@@ -8494,7 +8224,7 @@
             <a:prstDash val="solid"/>
           </a:ln>
           <a:effectLst>
-            <a:outerShdw sx="100000" sy="100000" kx="0" ky="0" algn="bl" rotWithShape="0" blurRad="101600" dist="38100" dir="5400000">
+            <a:outerShdw blurRad="101600" dist="38100" dir="5400000" algn="bl" rotWithShape="0">
               <a:srgbClr val="8AA0B8">
                 <a:alpha val="35000"/>
               </a:srgbClr>
@@ -8584,14 +8314,14 @@
       </p:sp>
       <p:pic>
         <p:nvPicPr>
-          <p:cNvPr id="37" name="Image 4" descr="C:/Users/User/AppData/Local/Temp/claude/C--Users-User/ea6a698a-948e-482c-86db-1b1488ae8d08/scratchpad/shots/tour/nearby.png">    </p:cNvPr>
+          <p:cNvPr id="37" name="Image 4" descr="C:/Users/User/AppData/Local/Temp/claude/C--Users-User/ea6a698a-948e-482c-86db-1b1488ae8d08/scratchpad/shots/tour/nearby.png"/>
           <p:cNvPicPr>
             <a:picLocks noChangeAspect="1"/>
           </p:cNvPicPr>
           <p:nvPr/>
         </p:nvPicPr>
         <p:blipFill>
-          <a:blip r:embed="rId5"/>
+          <a:blip r:embed="rId7"/>
           <a:stretch>
             <a:fillRect/>
           </a:stretch>
@@ -8627,7 +8357,7 @@
           <a:bodyPr wrap="square" lIns="0" tIns="0" rIns="0" bIns="0" rtlCol="0" anchor="t"/>
           <a:lstStyle/>
           <a:p>
-            <a:pPr algn="ctr" indent="0" marL="0">
+            <a:pPr marL="0" indent="0" algn="ctr">
               <a:lnSpc>
                 <a:spcPct val="100000"/>
               </a:lnSpc>
@@ -8674,7 +8404,7 @@
             <a:prstDash val="solid"/>
           </a:ln>
           <a:effectLst>
-            <a:outerShdw sx="100000" sy="100000" kx="0" ky="0" algn="bl" rotWithShape="0" blurRad="101600" dist="38100" dir="5400000">
+            <a:outerShdw blurRad="101600" dist="38100" dir="5400000" algn="bl" rotWithShape="0">
               <a:srgbClr val="8AA0B8">
                 <a:alpha val="35000"/>
               </a:srgbClr>
@@ -8764,14 +8494,14 @@
       </p:sp>
       <p:pic>
         <p:nvPicPr>
-          <p:cNvPr id="44" name="Image 5" descr="C:/Users/User/AppData/Local/Temp/claude/C--Users-User/ea6a698a-948e-482c-86db-1b1488ae8d08/scratchpad/shots/tour/employers.png">    </p:cNvPr>
+          <p:cNvPr id="44" name="Image 5" descr="C:/Users/User/AppData/Local/Temp/claude/C--Users-User/ea6a698a-948e-482c-86db-1b1488ae8d08/scratchpad/shots/tour/employers.png"/>
           <p:cNvPicPr>
             <a:picLocks noChangeAspect="1"/>
           </p:cNvPicPr>
           <p:nvPr/>
         </p:nvPicPr>
         <p:blipFill>
-          <a:blip r:embed="rId6"/>
+          <a:blip r:embed="rId8"/>
           <a:stretch>
             <a:fillRect/>
           </a:stretch>
@@ -8807,7 +8537,7 @@
           <a:bodyPr wrap="square" lIns="0" tIns="0" rIns="0" bIns="0" rtlCol="0" anchor="t"/>
           <a:lstStyle/>
           <a:p>
-            <a:pPr algn="ctr" indent="0" marL="0">
+            <a:pPr marL="0" indent="0" algn="ctr">
               <a:lnSpc>
                 <a:spcPct val="100000"/>
               </a:lnSpc>
@@ -8849,7 +8579,7 @@
           <a:bodyPr wrap="square" lIns="0" tIns="0" rIns="0" bIns="0" rtlCol="0" anchor="ctr"/>
           <a:lstStyle/>
           <a:p>
-            <a:pPr algn="r" indent="0" marL="0">
+            <a:pPr marL="0" indent="0" algn="r">
               <a:buNone/>
             </a:pPr>
             <a:r>
@@ -8883,6 +8613,7 @@
         <a:solidFill>
           <a:srgbClr val="FFFFFF"/>
         </a:solidFill>
+        <a:effectLst/>
       </p:bgPr>
     </p:bg>
     <p:spTree>
@@ -8920,11 +8651,11 @@
           <a:bodyPr wrap="square" lIns="0" tIns="0" rIns="0" bIns="0" rtlCol="0" anchor="ctr"/>
           <a:lstStyle/>
           <a:p>
-            <a:pPr indent="0" marL="0">
-              <a:buNone/>
-            </a:pPr>
-            <a:r>
-              <a:rPr lang="en-US" sz="1200" b="1" spc="200" kern="0" dirty="0">
+            <a:pPr marL="0" indent="0">
+              <a:buNone/>
+            </a:pPr>
+            <a:r>
+              <a:rPr lang="en-US" sz="1200" b="1" kern="0" spc="200" dirty="0">
                 <a:solidFill>
                   <a:srgbClr val="02C39A"/>
                 </a:solidFill>
@@ -8959,7 +8690,7 @@
           <a:bodyPr wrap="square" lIns="0" tIns="0" rIns="0" bIns="0" rtlCol="0" anchor="ctr"/>
           <a:lstStyle/>
           <a:p>
-            <a:pPr indent="0" marL="0">
+            <a:pPr marL="0" indent="0">
               <a:buNone/>
             </a:pPr>
             <a:r>
@@ -9040,7 +8771,7 @@
           <a:bodyPr wrap="square" lIns="0" tIns="0" rIns="0" bIns="0" rtlCol="0" anchor="ctr"/>
           <a:lstStyle/>
           <a:p>
-            <a:pPr algn="ctr" indent="0" marL="0">
+            <a:pPr marL="0" indent="0" algn="ctr">
               <a:buNone/>
             </a:pPr>
             <a:r>
@@ -9079,7 +8810,7 @@
           <a:bodyPr wrap="square" lIns="0" tIns="0" rIns="0" bIns="0" rtlCol="0" anchor="ctr"/>
           <a:lstStyle/>
           <a:p>
-            <a:pPr indent="0" marL="0">
+            <a:pPr marL="0" indent="0">
               <a:buNone/>
             </a:pPr>
             <a:r>
@@ -9118,7 +8849,7 @@
           <a:bodyPr wrap="square" lIns="0" tIns="0" rIns="0" bIns="0" rtlCol="0" anchor="ctr"/>
           <a:lstStyle/>
           <a:p>
-            <a:pPr algn="ctr" indent="0" marL="0">
+            <a:pPr marL="0" indent="0" algn="ctr">
               <a:buNone/>
             </a:pPr>
             <a:r>
@@ -9199,7 +8930,7 @@
           <a:bodyPr wrap="square" lIns="0" tIns="0" rIns="0" bIns="0" rtlCol="0" anchor="ctr"/>
           <a:lstStyle/>
           <a:p>
-            <a:pPr algn="ctr" indent="0" marL="0">
+            <a:pPr marL="0" indent="0" algn="ctr">
               <a:buNone/>
             </a:pPr>
             <a:r>
@@ -9238,7 +8969,7 @@
           <a:bodyPr wrap="square" lIns="0" tIns="0" rIns="0" bIns="0" rtlCol="0" anchor="ctr"/>
           <a:lstStyle/>
           <a:p>
-            <a:pPr indent="0" marL="0">
+            <a:pPr marL="0" indent="0">
               <a:buNone/>
             </a:pPr>
             <a:r>
@@ -9277,7 +9008,7 @@
           <a:bodyPr wrap="square" lIns="0" tIns="0" rIns="0" bIns="0" rtlCol="0" anchor="ctr"/>
           <a:lstStyle/>
           <a:p>
-            <a:pPr algn="ctr" indent="0" marL="0">
+            <a:pPr marL="0" indent="0" algn="ctr">
               <a:buNone/>
             </a:pPr>
             <a:r>
@@ -9358,7 +9089,7 @@
           <a:bodyPr wrap="square" lIns="0" tIns="0" rIns="0" bIns="0" rtlCol="0" anchor="ctr"/>
           <a:lstStyle/>
           <a:p>
-            <a:pPr algn="ctr" indent="0" marL="0">
+            <a:pPr marL="0" indent="0" algn="ctr">
               <a:buNone/>
             </a:pPr>
             <a:r>
@@ -9397,7 +9128,7 @@
           <a:bodyPr wrap="square" lIns="0" tIns="0" rIns="0" bIns="0" rtlCol="0" anchor="ctr"/>
           <a:lstStyle/>
           <a:p>
-            <a:pPr indent="0" marL="0">
+            <a:pPr marL="0" indent="0">
               <a:buNone/>
             </a:pPr>
             <a:r>
@@ -9409,7 +9140,23 @@
                 <a:ea typeface="Calibri" pitchFamily="34" charset="-122"/>
                 <a:cs typeface="Calibri" pitchFamily="34" charset="-120"/>
               </a:rPr>
-              <a:t>Apply / AI Apply</a:t>
+              <a:t>Normal Apply  /</a:t>
+            </a:r>
+          </a:p>
+          <a:p>
+            <a:pPr marL="0" indent="0">
+              <a:buNone/>
+            </a:pPr>
+            <a:r>
+              <a:rPr lang="en-US" sz="1150" b="1" dirty="0">
+                <a:solidFill>
+                  <a:srgbClr val="17263D"/>
+                </a:solidFill>
+                <a:latin typeface="Calibri" pitchFamily="34" charset="0"/>
+                <a:ea typeface="Calibri" pitchFamily="34" charset="-122"/>
+                <a:cs typeface="Calibri" pitchFamily="34" charset="-120"/>
+              </a:rPr>
+              <a:t> AI Apply</a:t>
             </a:r>
             <a:endParaRPr lang="en-US" sz="1150" dirty="0"/>
           </a:p>
@@ -9436,7 +9183,7 @@
           <a:bodyPr wrap="square" lIns="0" tIns="0" rIns="0" bIns="0" rtlCol="0" anchor="ctr"/>
           <a:lstStyle/>
           <a:p>
-            <a:pPr algn="ctr" indent="0" marL="0">
+            <a:pPr marL="0" indent="0" algn="ctr">
               <a:buNone/>
             </a:pPr>
             <a:r>
@@ -9517,7 +9264,7 @@
           <a:bodyPr wrap="square" lIns="0" tIns="0" rIns="0" bIns="0" rtlCol="0" anchor="ctr"/>
           <a:lstStyle/>
           <a:p>
-            <a:pPr algn="ctr" indent="0" marL="0">
+            <a:pPr marL="0" indent="0" algn="ctr">
               <a:buNone/>
             </a:pPr>
             <a:r>
@@ -9556,7 +9303,7 @@
           <a:bodyPr wrap="square" lIns="0" tIns="0" rIns="0" bIns="0" rtlCol="0" anchor="ctr"/>
           <a:lstStyle/>
           <a:p>
-            <a:pPr indent="0" marL="0">
+            <a:pPr marL="0" indent="0">
               <a:buNone/>
             </a:pPr>
             <a:r>
@@ -9595,7 +9342,7 @@
           <a:bodyPr wrap="square" lIns="0" tIns="0" rIns="0" bIns="0" rtlCol="0" anchor="ctr"/>
           <a:lstStyle/>
           <a:p>
-            <a:pPr algn="ctr" indent="0" marL="0">
+            <a:pPr marL="0" indent="0" algn="ctr">
               <a:buNone/>
             </a:pPr>
             <a:r>
@@ -9676,7 +9423,7 @@
           <a:bodyPr wrap="square" lIns="0" tIns="0" rIns="0" bIns="0" rtlCol="0" anchor="ctr"/>
           <a:lstStyle/>
           <a:p>
-            <a:pPr algn="ctr" indent="0" marL="0">
+            <a:pPr marL="0" indent="0" algn="ctr">
               <a:buNone/>
             </a:pPr>
             <a:r>
@@ -9715,7 +9462,7 @@
           <a:bodyPr wrap="square" lIns="0" tIns="0" rIns="0" bIns="0" rtlCol="0" anchor="ctr"/>
           <a:lstStyle/>
           <a:p>
-            <a:pPr indent="0" marL="0">
+            <a:pPr marL="0" indent="0">
               <a:buNone/>
             </a:pPr>
             <a:r>
@@ -9759,7 +9506,7 @@
             <a:prstDash val="solid"/>
           </a:ln>
           <a:effectLst>
-            <a:outerShdw sx="100000" sy="100000" kx="0" ky="0" algn="bl" rotWithShape="0" blurRad="101600" dist="38100" dir="5400000">
+            <a:outerShdw blurRad="101600" dist="38100" dir="5400000" algn="bl" rotWithShape="0">
               <a:srgbClr val="8AA0B8">
                 <a:alpha val="35000"/>
               </a:srgbClr>
@@ -9849,14 +9596,14 @@
       </p:sp>
       <p:pic>
         <p:nvPicPr>
-          <p:cNvPr id="33" name="Image 0" descr="C:/Users/User/AppData/Local/Temp/claude/C--Users-User/ea6a698a-948e-482c-86db-1b1488ae8d08/scratchpad/shots/jobs.png">    </p:cNvPr>
+          <p:cNvPr id="33" name="Image 0" descr="C:/Users/User/AppData/Local/Temp/claude/C--Users-User/ea6a698a-948e-482c-86db-1b1488ae8d08/scratchpad/shots/jobs.png"/>
           <p:cNvPicPr>
             <a:picLocks noChangeAspect="1"/>
           </p:cNvPicPr>
           <p:nvPr/>
         </p:nvPicPr>
         <p:blipFill>
-          <a:blip r:embed="rId1"/>
+          <a:blip r:embed="rId3"/>
           <a:stretch>
             <a:fillRect/>
           </a:stretch>
@@ -9892,7 +9639,7 @@
           <a:bodyPr wrap="square" lIns="0" tIns="0" rIns="0" bIns="0" rtlCol="0" anchor="t"/>
           <a:lstStyle/>
           <a:p>
-            <a:pPr algn="ctr" indent="0" marL="0">
+            <a:pPr marL="0" indent="0" algn="ctr">
               <a:lnSpc>
                 <a:spcPct val="100000"/>
               </a:lnSpc>
@@ -9939,7 +9686,7 @@
             <a:prstDash val="solid"/>
           </a:ln>
           <a:effectLst>
-            <a:outerShdw sx="100000" sy="100000" kx="0" ky="0" algn="bl" rotWithShape="0" blurRad="101600" dist="38100" dir="5400000">
+            <a:outerShdw blurRad="101600" dist="38100" dir="5400000" algn="bl" rotWithShape="0">
               <a:srgbClr val="8AA0B8">
                 <a:alpha val="35000"/>
               </a:srgbClr>
@@ -10029,14 +9776,14 @@
       </p:sp>
       <p:pic>
         <p:nvPicPr>
-          <p:cNvPr id="40" name="Image 1" descr="C:/Users/User/AppData/Local/Temp/claude/C--Users-User/ea6a698a-948e-482c-86db-1b1488ae8d08/scratchpad/shots/swipe.png">    </p:cNvPr>
+          <p:cNvPr id="40" name="Image 1" descr="C:/Users/User/AppData/Local/Temp/claude/C--Users-User/ea6a698a-948e-482c-86db-1b1488ae8d08/scratchpad/shots/swipe.png"/>
           <p:cNvPicPr>
             <a:picLocks noChangeAspect="1"/>
           </p:cNvPicPr>
           <p:nvPr/>
         </p:nvPicPr>
         <p:blipFill>
-          <a:blip r:embed="rId2"/>
+          <a:blip r:embed="rId4"/>
           <a:stretch>
             <a:fillRect/>
           </a:stretch>
@@ -10072,7 +9819,7 @@
           <a:bodyPr wrap="square" lIns="0" tIns="0" rIns="0" bIns="0" rtlCol="0" anchor="t"/>
           <a:lstStyle/>
           <a:p>
-            <a:pPr algn="ctr" indent="0" marL="0">
+            <a:pPr marL="0" indent="0" algn="ctr">
               <a:lnSpc>
                 <a:spcPct val="100000"/>
               </a:lnSpc>
@@ -10114,7 +9861,7 @@
           <a:bodyPr wrap="square" lIns="0" tIns="0" rIns="0" bIns="0" rtlCol="0" anchor="ctr"/>
           <a:lstStyle/>
           <a:p>
-            <a:pPr algn="r" indent="0" marL="0">
+            <a:pPr marL="0" indent="0" algn="r">
               <a:buNone/>
             </a:pPr>
             <a:r>
@@ -10148,6 +9895,7 @@
         <a:solidFill>
           <a:srgbClr val="FFFFFF"/>
         </a:solidFill>
+        <a:effectLst/>
       </p:bgPr>
     </p:bg>
     <p:spTree>
@@ -10185,11 +9933,11 @@
           <a:bodyPr wrap="square" lIns="0" tIns="0" rIns="0" bIns="0" rtlCol="0" anchor="ctr"/>
           <a:lstStyle/>
           <a:p>
-            <a:pPr indent="0" marL="0">
-              <a:buNone/>
-            </a:pPr>
-            <a:r>
-              <a:rPr lang="en-US" sz="1200" b="1" spc="200" kern="0" dirty="0">
+            <a:pPr marL="0" indent="0">
+              <a:buNone/>
+            </a:pPr>
+            <a:r>
+              <a:rPr lang="en-US" sz="1200" b="1" kern="0" spc="200" dirty="0">
                 <a:solidFill>
                   <a:srgbClr val="02C39A"/>
                 </a:solidFill>
@@ -10224,7 +9972,7 @@
           <a:bodyPr wrap="square" lIns="0" tIns="0" rIns="0" bIns="0" rtlCol="0" anchor="ctr"/>
           <a:lstStyle/>
           <a:p>
-            <a:pPr indent="0" marL="0">
+            <a:pPr marL="0" indent="0">
               <a:buNone/>
             </a:pPr>
             <a:r>
@@ -10263,7 +10011,7 @@
           </a:solidFill>
           <a:ln/>
           <a:effectLst>
-            <a:outerShdw sx="100000" sy="100000" kx="0" ky="0" algn="bl" rotWithShape="0" blurRad="101600" dist="38100" dir="5400000">
+            <a:outerShdw blurRad="101600" dist="38100" dir="5400000" algn="bl" rotWithShape="0">
               <a:srgbClr val="8AA0B8">
                 <a:alpha val="35000"/>
               </a:srgbClr>
@@ -10314,7 +10062,7 @@
           <a:bodyPr wrap="square" lIns="0" tIns="0" rIns="0" bIns="0" rtlCol="0" anchor="ctr"/>
           <a:lstStyle/>
           <a:p>
-            <a:pPr algn="ctr" indent="0" marL="0">
+            <a:pPr marL="0" indent="0" algn="ctr">
               <a:buNone/>
             </a:pPr>
             <a:r>
@@ -10353,7 +10101,7 @@
           <a:bodyPr wrap="square" lIns="0" tIns="0" rIns="0" bIns="0" rtlCol="0" anchor="ctr"/>
           <a:lstStyle/>
           <a:p>
-            <a:pPr indent="0" marL="0">
+            <a:pPr marL="0" indent="0">
               <a:buNone/>
             </a:pPr>
             <a:r>
@@ -10392,7 +10140,7 @@
           <a:bodyPr wrap="square" lIns="0" tIns="0" rIns="0" bIns="0" rtlCol="0" anchor="t"/>
           <a:lstStyle/>
           <a:p>
-            <a:pPr indent="0" marL="0">
+            <a:pPr marL="0" indent="0">
               <a:buNone/>
             </a:pPr>
             <a:r>
@@ -10431,7 +10179,7 @@
           </a:solidFill>
           <a:ln/>
           <a:effectLst>
-            <a:outerShdw sx="100000" sy="100000" kx="0" ky="0" algn="bl" rotWithShape="0" blurRad="101600" dist="38100" dir="5400000">
+            <a:outerShdw blurRad="101600" dist="38100" dir="5400000" algn="bl" rotWithShape="0">
               <a:srgbClr val="8AA0B8">
                 <a:alpha val="35000"/>
               </a:srgbClr>
@@ -10482,7 +10230,7 @@
           <a:bodyPr wrap="square" lIns="0" tIns="0" rIns="0" bIns="0" rtlCol="0" anchor="ctr"/>
           <a:lstStyle/>
           <a:p>
-            <a:pPr algn="ctr" indent="0" marL="0">
+            <a:pPr marL="0" indent="0" algn="ctr">
               <a:buNone/>
             </a:pPr>
             <a:r>
@@ -10521,7 +10269,7 @@
           <a:bodyPr wrap="square" lIns="0" tIns="0" rIns="0" bIns="0" rtlCol="0" anchor="ctr"/>
           <a:lstStyle/>
           <a:p>
-            <a:pPr indent="0" marL="0">
+            <a:pPr marL="0" indent="0">
               <a:buNone/>
             </a:pPr>
             <a:r>
@@ -10560,7 +10308,7 @@
           <a:bodyPr wrap="square" lIns="0" tIns="0" rIns="0" bIns="0" rtlCol="0" anchor="t"/>
           <a:lstStyle/>
           <a:p>
-            <a:pPr indent="0" marL="0">
+            <a:pPr marL="0" indent="0">
               <a:buNone/>
             </a:pPr>
             <a:r>
@@ -10599,7 +10347,7 @@
           </a:solidFill>
           <a:ln/>
           <a:effectLst>
-            <a:outerShdw sx="100000" sy="100000" kx="0" ky="0" algn="bl" rotWithShape="0" blurRad="101600" dist="38100" dir="5400000">
+            <a:outerShdw blurRad="101600" dist="38100" dir="5400000" algn="bl" rotWithShape="0">
               <a:srgbClr val="8AA0B8">
                 <a:alpha val="35000"/>
               </a:srgbClr>
@@ -10650,7 +10398,7 @@
           <a:bodyPr wrap="square" lIns="0" tIns="0" rIns="0" bIns="0" rtlCol="0" anchor="ctr"/>
           <a:lstStyle/>
           <a:p>
-            <a:pPr algn="ctr" indent="0" marL="0">
+            <a:pPr marL="0" indent="0" algn="ctr">
               <a:buNone/>
             </a:pPr>
             <a:r>
@@ -10689,7 +10437,7 @@
           <a:bodyPr wrap="square" lIns="0" tIns="0" rIns="0" bIns="0" rtlCol="0" anchor="ctr"/>
           <a:lstStyle/>
           <a:p>
-            <a:pPr indent="0" marL="0">
+            <a:pPr marL="0" indent="0">
               <a:buNone/>
             </a:pPr>
             <a:r>
@@ -10728,7 +10476,7 @@
           <a:bodyPr wrap="square" lIns="0" tIns="0" rIns="0" bIns="0" rtlCol="0" anchor="t"/>
           <a:lstStyle/>
           <a:p>
-            <a:pPr indent="0" marL="0">
+            <a:pPr marL="0" indent="0">
               <a:buNone/>
             </a:pPr>
             <a:r>
@@ -10767,7 +10515,7 @@
           </a:solidFill>
           <a:ln/>
           <a:effectLst>
-            <a:outerShdw sx="100000" sy="100000" kx="0" ky="0" algn="bl" rotWithShape="0" blurRad="101600" dist="38100" dir="5400000">
+            <a:outerShdw blurRad="101600" dist="38100" dir="5400000" algn="bl" rotWithShape="0">
               <a:srgbClr val="8AA0B8">
                 <a:alpha val="35000"/>
               </a:srgbClr>
@@ -10818,7 +10566,7 @@
           <a:bodyPr wrap="square" lIns="0" tIns="0" rIns="0" bIns="0" rtlCol="0" anchor="ctr"/>
           <a:lstStyle/>
           <a:p>
-            <a:pPr algn="ctr" indent="0" marL="0">
+            <a:pPr marL="0" indent="0" algn="ctr">
               <a:buNone/>
             </a:pPr>
             <a:r>
@@ -10857,7 +10605,7 @@
           <a:bodyPr wrap="square" lIns="0" tIns="0" rIns="0" bIns="0" rtlCol="0" anchor="ctr"/>
           <a:lstStyle/>
           <a:p>
-            <a:pPr indent="0" marL="0">
+            <a:pPr marL="0" indent="0">
               <a:buNone/>
             </a:pPr>
             <a:r>
@@ -10896,7 +10644,7 @@
           <a:bodyPr wrap="square" lIns="0" tIns="0" rIns="0" bIns="0" rtlCol="0" anchor="t"/>
           <a:lstStyle/>
           <a:p>
-            <a:pPr indent="0" marL="0">
+            <a:pPr marL="0" indent="0">
               <a:buNone/>
             </a:pPr>
             <a:r>
@@ -10940,7 +10688,7 @@
             <a:prstDash val="solid"/>
           </a:ln>
           <a:effectLst>
-            <a:outerShdw sx="100000" sy="100000" kx="0" ky="0" algn="bl" rotWithShape="0" blurRad="101600" dist="38100" dir="5400000">
+            <a:outerShdw blurRad="101600" dist="38100" dir="5400000" algn="bl" rotWithShape="0">
               <a:srgbClr val="8AA0B8">
                 <a:alpha val="35000"/>
               </a:srgbClr>
@@ -11030,14 +10778,14 @@
       </p:sp>
       <p:pic>
         <p:nvPicPr>
-          <p:cNvPr id="29" name="Image 0" descr="C:/Users/User/AppData/Local/Temp/claude/C--Users-User/ea6a698a-948e-482c-86db-1b1488ae8d08/scratchpad/shots/employers.png">    </p:cNvPr>
+          <p:cNvPr id="29" name="Image 0" descr="C:/Users/User/AppData/Local/Temp/claude/C--Users-User/ea6a698a-948e-482c-86db-1b1488ae8d08/scratchpad/shots/employers.png"/>
           <p:cNvPicPr>
             <a:picLocks noChangeAspect="1"/>
           </p:cNvPicPr>
           <p:nvPr/>
         </p:nvPicPr>
         <p:blipFill>
-          <a:blip r:embed="rId1"/>
+          <a:blip r:embed="rId3"/>
           <a:stretch>
             <a:fillRect/>
           </a:stretch>
@@ -11073,7 +10821,7 @@
           <a:bodyPr wrap="square" lIns="0" tIns="0" rIns="0" bIns="0" rtlCol="0" anchor="t"/>
           <a:lstStyle/>
           <a:p>
-            <a:pPr algn="ctr" indent="0" marL="0">
+            <a:pPr marL="0" indent="0" algn="ctr">
               <a:lnSpc>
                 <a:spcPct val="100000"/>
               </a:lnSpc>
@@ -11115,7 +10863,7 @@
           <a:bodyPr wrap="square" lIns="0" tIns="0" rIns="0" bIns="0" rtlCol="0" anchor="ctr"/>
           <a:lstStyle/>
           <a:p>
-            <a:pPr algn="r" indent="0" marL="0">
+            <a:pPr marL="0" indent="0" algn="r">
               <a:buNone/>
             </a:pPr>
             <a:r>
@@ -11149,6 +10897,7 @@
         <a:solidFill>
           <a:srgbClr val="FFFFFF"/>
         </a:solidFill>
+        <a:effectLst/>
       </p:bgPr>
     </p:bg>
     <p:spTree>
@@ -11186,11 +10935,11 @@
           <a:bodyPr wrap="square" lIns="0" tIns="0" rIns="0" bIns="0" rtlCol="0" anchor="ctr"/>
           <a:lstStyle/>
           <a:p>
-            <a:pPr indent="0" marL="0">
-              <a:buNone/>
-            </a:pPr>
-            <a:r>
-              <a:rPr lang="en-US" sz="1200" b="1" spc="200" kern="0" dirty="0">
+            <a:pPr marL="0" indent="0">
+              <a:buNone/>
+            </a:pPr>
+            <a:r>
+              <a:rPr lang="en-US" sz="1200" b="1" kern="0" spc="200" dirty="0">
                 <a:solidFill>
                   <a:srgbClr val="02C39A"/>
                 </a:solidFill>
@@ -11225,7 +10974,7 @@
           <a:bodyPr wrap="square" lIns="0" tIns="0" rIns="0" bIns="0" rtlCol="0" anchor="ctr"/>
           <a:lstStyle/>
           <a:p>
-            <a:pPr indent="0" marL="0">
+            <a:pPr marL="0" indent="0">
               <a:buNone/>
             </a:pPr>
             <a:r>
@@ -11264,7 +11013,7 @@
           <a:bodyPr wrap="square" lIns="0" tIns="0" rIns="0" bIns="0" rtlCol="0" anchor="ctr"/>
           <a:lstStyle/>
           <a:p>
-            <a:pPr indent="0" marL="0">
+            <a:pPr marL="0" indent="0">
               <a:buNone/>
             </a:pPr>
             <a:r>
@@ -11303,7 +11052,7 @@
           </a:solidFill>
           <a:ln/>
           <a:effectLst>
-            <a:outerShdw sx="100000" sy="100000" kx="0" ky="0" algn="bl" rotWithShape="0" blurRad="101600" dist="38100" dir="5400000">
+            <a:outerShdw blurRad="101600" dist="38100" dir="5400000" algn="bl" rotWithShape="0">
               <a:srgbClr val="8AA0B8">
                 <a:alpha val="35000"/>
               </a:srgbClr>
@@ -11332,7 +11081,7 @@
           <a:bodyPr wrap="square" lIns="0" tIns="0" rIns="0" bIns="0" rtlCol="0" anchor="ctr"/>
           <a:lstStyle/>
           <a:p>
-            <a:pPr indent="0" marL="0">
+            <a:pPr marL="0" indent="0">
               <a:buNone/>
             </a:pPr>
             <a:r>
@@ -11371,7 +11120,7 @@
           <a:bodyPr wrap="square" lIns="0" tIns="0" rIns="0" bIns="0" rtlCol="0" anchor="ctr"/>
           <a:lstStyle/>
           <a:p>
-            <a:pPr indent="0" marL="0">
+            <a:pPr marL="0" indent="0">
               <a:buNone/>
             </a:pPr>
             <a:r>
@@ -11410,7 +11159,7 @@
           <a:bodyPr wrap="square" lIns="0" tIns="0" rIns="0" bIns="0" rtlCol="0" anchor="ctr"/>
           <a:lstStyle/>
           <a:p>
-            <a:pPr algn="r" indent="0" marL="0">
+            <a:pPr marL="0" indent="0" algn="r">
               <a:buNone/>
             </a:pPr>
             <a:r>
@@ -11449,7 +11198,7 @@
           </a:solidFill>
           <a:ln/>
           <a:effectLst>
-            <a:outerShdw sx="100000" sy="100000" kx="0" ky="0" algn="bl" rotWithShape="0" blurRad="101600" dist="38100" dir="5400000">
+            <a:outerShdw blurRad="101600" dist="38100" dir="5400000" algn="bl" rotWithShape="0">
               <a:srgbClr val="8AA0B8">
                 <a:alpha val="35000"/>
               </a:srgbClr>
@@ -11478,7 +11227,7 @@
           <a:bodyPr wrap="square" lIns="0" tIns="0" rIns="0" bIns="0" rtlCol="0" anchor="ctr"/>
           <a:lstStyle/>
           <a:p>
-            <a:pPr indent="0" marL="0">
+            <a:pPr marL="0" indent="0">
               <a:buNone/>
             </a:pPr>
             <a:r>
@@ -11517,7 +11266,7 @@
           <a:bodyPr wrap="square" lIns="0" tIns="0" rIns="0" bIns="0" rtlCol="0" anchor="ctr"/>
           <a:lstStyle/>
           <a:p>
-            <a:pPr indent="0" marL="0">
+            <a:pPr marL="0" indent="0">
               <a:buNone/>
             </a:pPr>
             <a:r>
@@ -11556,7 +11305,7 @@
           <a:bodyPr wrap="square" lIns="0" tIns="0" rIns="0" bIns="0" rtlCol="0" anchor="ctr"/>
           <a:lstStyle/>
           <a:p>
-            <a:pPr algn="r" indent="0" marL="0">
+            <a:pPr marL="0" indent="0" algn="r">
               <a:buNone/>
             </a:pPr>
             <a:r>
@@ -11595,7 +11344,7 @@
           </a:solidFill>
           <a:ln/>
           <a:effectLst>
-            <a:outerShdw sx="100000" sy="100000" kx="0" ky="0" algn="bl" rotWithShape="0" blurRad="101600" dist="38100" dir="5400000">
+            <a:outerShdw blurRad="101600" dist="38100" dir="5400000" algn="bl" rotWithShape="0">
               <a:srgbClr val="8AA0B8">
                 <a:alpha val="35000"/>
               </a:srgbClr>
@@ -11624,7 +11373,7 @@
           <a:bodyPr wrap="square" lIns="0" tIns="0" rIns="0" bIns="0" rtlCol="0" anchor="ctr"/>
           <a:lstStyle/>
           <a:p>
-            <a:pPr indent="0" marL="0">
+            <a:pPr marL="0" indent="0">
               <a:buNone/>
             </a:pPr>
             <a:r>
@@ -11663,7 +11412,7 @@
           <a:bodyPr wrap="square" lIns="0" tIns="0" rIns="0" bIns="0" rtlCol="0" anchor="ctr"/>
           <a:lstStyle/>
           <a:p>
-            <a:pPr indent="0" marL="0">
+            <a:pPr marL="0" indent="0">
               <a:buNone/>
             </a:pPr>
             <a:r>
@@ -11702,7 +11451,7 @@
           <a:bodyPr wrap="square" lIns="0" tIns="0" rIns="0" bIns="0" rtlCol="0" anchor="ctr"/>
           <a:lstStyle/>
           <a:p>
-            <a:pPr algn="r" indent="0" marL="0">
+            <a:pPr marL="0" indent="0" algn="r">
               <a:buNone/>
             </a:pPr>
             <a:r>
@@ -11741,7 +11490,7 @@
           <a:bodyPr wrap="square" lIns="0" tIns="0" rIns="0" bIns="0" rtlCol="0" anchor="ctr"/>
           <a:lstStyle/>
           <a:p>
-            <a:pPr indent="0" marL="0">
+            <a:pPr marL="0" indent="0">
               <a:buNone/>
             </a:pPr>
             <a:r>
@@ -11800,7 +11549,7 @@
           <a:bodyPr wrap="square" lIns="0" tIns="0" rIns="0" bIns="0" rtlCol="0" anchor="ctr"/>
           <a:lstStyle/>
           <a:p>
-            <a:pPr indent="0" marL="0">
+            <a:pPr marL="0" indent="0">
               <a:buNone/>
             </a:pPr>
             <a:r>
@@ -11839,7 +11588,7 @@
           <a:bodyPr wrap="square" lIns="0" tIns="0" rIns="0" bIns="0" rtlCol="0" anchor="ctr"/>
           <a:lstStyle/>
           <a:p>
-            <a:pPr algn="ctr" indent="0" marL="0">
+            <a:pPr marL="0" indent="0" algn="ctr">
               <a:buNone/>
             </a:pPr>
             <a:r>
@@ -11878,7 +11627,7 @@
           <a:bodyPr wrap="square" lIns="0" tIns="0" rIns="0" bIns="0" rtlCol="0" anchor="ctr"/>
           <a:lstStyle/>
           <a:p>
-            <a:pPr algn="r" indent="0" marL="0">
+            <a:pPr marL="0" indent="0" algn="r">
               <a:buNone/>
             </a:pPr>
             <a:r>
@@ -11917,7 +11666,7 @@
           <a:bodyPr wrap="square" lIns="0" tIns="0" rIns="0" bIns="0" rtlCol="0" anchor="ctr"/>
           <a:lstStyle/>
           <a:p>
-            <a:pPr indent="0" marL="0">
+            <a:pPr marL="0" indent="0">
               <a:buNone/>
             </a:pPr>
             <a:r>
@@ -11956,7 +11705,7 @@
           <a:bodyPr wrap="square" lIns="0" tIns="0" rIns="0" bIns="0" rtlCol="0" anchor="ctr"/>
           <a:lstStyle/>
           <a:p>
-            <a:pPr algn="ctr" indent="0" marL="0">
+            <a:pPr marL="0" indent="0" algn="ctr">
               <a:buNone/>
             </a:pPr>
             <a:r>
@@ -11995,7 +11744,7 @@
           <a:bodyPr wrap="square" lIns="0" tIns="0" rIns="0" bIns="0" rtlCol="0" anchor="ctr"/>
           <a:lstStyle/>
           <a:p>
-            <a:pPr algn="r" indent="0" marL="0">
+            <a:pPr marL="0" indent="0" algn="r">
               <a:buNone/>
             </a:pPr>
             <a:r>
@@ -12054,7 +11803,7 @@
           <a:bodyPr wrap="square" lIns="0" tIns="0" rIns="0" bIns="0" rtlCol="0" anchor="ctr"/>
           <a:lstStyle/>
           <a:p>
-            <a:pPr indent="0" marL="0">
+            <a:pPr marL="0" indent="0">
               <a:buNone/>
             </a:pPr>
             <a:r>
@@ -12093,7 +11842,7 @@
           <a:bodyPr wrap="square" lIns="0" tIns="0" rIns="0" bIns="0" rtlCol="0" anchor="ctr"/>
           <a:lstStyle/>
           <a:p>
-            <a:pPr algn="ctr" indent="0" marL="0">
+            <a:pPr marL="0" indent="0" algn="ctr">
               <a:buNone/>
             </a:pPr>
             <a:r>
@@ -12132,7 +11881,7 @@
           <a:bodyPr wrap="square" lIns="0" tIns="0" rIns="0" bIns="0" rtlCol="0" anchor="ctr"/>
           <a:lstStyle/>
           <a:p>
-            <a:pPr algn="r" indent="0" marL="0">
+            <a:pPr marL="0" indent="0" algn="r">
               <a:buNone/>
             </a:pPr>
             <a:r>
@@ -12171,7 +11920,7 @@
           <a:bodyPr wrap="square" lIns="0" tIns="0" rIns="0" bIns="0" rtlCol="0" anchor="ctr"/>
           <a:lstStyle/>
           <a:p>
-            <a:pPr indent="0" marL="0">
+            <a:pPr marL="0" indent="0">
               <a:buNone/>
             </a:pPr>
             <a:r>
@@ -12210,7 +11959,7 @@
           <a:bodyPr wrap="square" lIns="0" tIns="0" rIns="0" bIns="0" rtlCol="0" anchor="ctr"/>
           <a:lstStyle/>
           <a:p>
-            <a:pPr algn="ctr" indent="0" marL="0">
+            <a:pPr marL="0" indent="0" algn="ctr">
               <a:buNone/>
             </a:pPr>
             <a:r>
@@ -12249,7 +11998,7 @@
           <a:bodyPr wrap="square" lIns="0" tIns="0" rIns="0" bIns="0" rtlCol="0" anchor="ctr"/>
           <a:lstStyle/>
           <a:p>
-            <a:pPr algn="r" indent="0" marL="0">
+            <a:pPr marL="0" indent="0" algn="r">
               <a:buNone/>
             </a:pPr>
             <a:r>
@@ -12308,7 +12057,7 @@
           <a:bodyPr wrap="square" lIns="0" tIns="0" rIns="0" bIns="0" rtlCol="0" anchor="ctr"/>
           <a:lstStyle/>
           <a:p>
-            <a:pPr indent="0" marL="0">
+            <a:pPr marL="0" indent="0">
               <a:buNone/>
             </a:pPr>
             <a:r>
@@ -12347,7 +12096,7 @@
           <a:bodyPr wrap="square" lIns="0" tIns="0" rIns="0" bIns="0" rtlCol="0" anchor="ctr"/>
           <a:lstStyle/>
           <a:p>
-            <a:pPr algn="ctr" indent="0" marL="0">
+            <a:pPr marL="0" indent="0" algn="ctr">
               <a:buNone/>
             </a:pPr>
             <a:r>
@@ -12386,7 +12135,7 @@
           <a:bodyPr wrap="square" lIns="0" tIns="0" rIns="0" bIns="0" rtlCol="0" anchor="ctr"/>
           <a:lstStyle/>
           <a:p>
-            <a:pPr algn="r" indent="0" marL="0">
+            <a:pPr marL="0" indent="0" algn="r">
               <a:buNone/>
             </a:pPr>
             <a:r>
@@ -12425,7 +12174,7 @@
           <a:bodyPr wrap="square" lIns="0" tIns="0" rIns="0" bIns="0" rtlCol="0" anchor="ctr"/>
           <a:lstStyle/>
           <a:p>
-            <a:pPr indent="0" marL="0">
+            <a:pPr marL="0" indent="0">
               <a:buNone/>
             </a:pPr>
             <a:r>
@@ -12464,7 +12213,7 @@
           <a:bodyPr wrap="square" lIns="0" tIns="0" rIns="0" bIns="0" rtlCol="0" anchor="ctr"/>
           <a:lstStyle/>
           <a:p>
-            <a:pPr algn="ctr" indent="0" marL="0">
+            <a:pPr marL="0" indent="0" algn="ctr">
               <a:buNone/>
             </a:pPr>
             <a:r>
@@ -12503,7 +12252,7 @@
           <a:bodyPr wrap="square" lIns="0" tIns="0" rIns="0" bIns="0" rtlCol="0" anchor="ctr"/>
           <a:lstStyle/>
           <a:p>
-            <a:pPr algn="r" indent="0" marL="0">
+            <a:pPr marL="0" indent="0" algn="r">
               <a:buNone/>
             </a:pPr>
             <a:r>
@@ -12542,7 +12291,7 @@
           <a:bodyPr wrap="square" lIns="0" tIns="0" rIns="0" bIns="0" rtlCol="0" anchor="ctr"/>
           <a:lstStyle/>
           <a:p>
-            <a:pPr indent="0" marL="0">
+            <a:pPr marL="0" indent="0">
               <a:buNone/>
             </a:pPr>
             <a:r>
@@ -12581,7 +12330,7 @@
           <a:bodyPr wrap="square" lIns="0" tIns="0" rIns="0" bIns="0" rtlCol="0" anchor="ctr"/>
           <a:lstStyle/>
           <a:p>
-            <a:pPr algn="r" indent="0" marL="0">
+            <a:pPr marL="0" indent="0" algn="r">
               <a:buNone/>
             </a:pPr>
             <a:r>
@@ -12615,6 +12364,7 @@
         <a:solidFill>
           <a:srgbClr val="FFFFFF"/>
         </a:solidFill>
+        <a:effectLst/>
       </p:bgPr>
     </p:bg>
     <p:spTree>
@@ -12652,11 +12402,11 @@
           <a:bodyPr wrap="square" lIns="0" tIns="0" rIns="0" bIns="0" rtlCol="0" anchor="ctr"/>
           <a:lstStyle/>
           <a:p>
-            <a:pPr indent="0" marL="0">
-              <a:buNone/>
-            </a:pPr>
-            <a:r>
-              <a:rPr lang="en-US" sz="1200" b="1" spc="200" kern="0" dirty="0">
+            <a:pPr marL="0" indent="0">
+              <a:buNone/>
+            </a:pPr>
+            <a:r>
+              <a:rPr lang="en-US" sz="1200" b="1" kern="0" spc="200" dirty="0">
                 <a:solidFill>
                   <a:srgbClr val="02C39A"/>
                 </a:solidFill>
@@ -12691,7 +12441,7 @@
           <a:bodyPr wrap="square" lIns="0" tIns="0" rIns="0" bIns="0" rtlCol="0" anchor="ctr"/>
           <a:lstStyle/>
           <a:p>
-            <a:pPr indent="0" marL="0">
+            <a:pPr marL="0" indent="0">
               <a:buNone/>
             </a:pPr>
             <a:r>
@@ -12730,7 +12480,7 @@
           </a:solidFill>
           <a:ln/>
           <a:effectLst>
-            <a:outerShdw sx="100000" sy="100000" kx="0" ky="0" algn="bl" rotWithShape="0" blurRad="101600" dist="38100" dir="5400000">
+            <a:outerShdw blurRad="101600" dist="38100" dir="5400000" algn="bl" rotWithShape="0">
               <a:srgbClr val="8AA0B8">
                 <a:alpha val="35000"/>
               </a:srgbClr>
@@ -12759,7 +12509,7 @@
           <a:bodyPr wrap="square" lIns="0" tIns="0" rIns="0" bIns="0" rtlCol="0" anchor="ctr"/>
           <a:lstStyle/>
           <a:p>
-            <a:pPr algn="ctr" indent="0" marL="0">
+            <a:pPr marL="0" indent="0" algn="ctr">
               <a:buNone/>
             </a:pPr>
             <a:r>
@@ -12798,7 +12548,7 @@
           <a:bodyPr wrap="square" lIns="0" tIns="0" rIns="0" bIns="0" rtlCol="0" anchor="ctr"/>
           <a:lstStyle/>
           <a:p>
-            <a:pPr algn="ctr" indent="0" marL="0">
+            <a:pPr marL="0" indent="0" algn="ctr">
               <a:buNone/>
             </a:pPr>
             <a:r>
@@ -12837,7 +12587,7 @@
           </a:solidFill>
           <a:ln/>
           <a:effectLst>
-            <a:outerShdw sx="100000" sy="100000" kx="0" ky="0" algn="bl" rotWithShape="0" blurRad="101600" dist="38100" dir="5400000">
+            <a:outerShdw blurRad="101600" dist="38100" dir="5400000" algn="bl" rotWithShape="0">
               <a:srgbClr val="8AA0B8">
                 <a:alpha val="35000"/>
               </a:srgbClr>
@@ -12866,7 +12616,7 @@
           <a:bodyPr wrap="square" lIns="0" tIns="0" rIns="0" bIns="0" rtlCol="0" anchor="ctr"/>
           <a:lstStyle/>
           <a:p>
-            <a:pPr algn="ctr" indent="0" marL="0">
+            <a:pPr marL="0" indent="0" algn="ctr">
               <a:buNone/>
             </a:pPr>
             <a:r>
@@ -12905,7 +12655,7 @@
           <a:bodyPr wrap="square" lIns="0" tIns="0" rIns="0" bIns="0" rtlCol="0" anchor="ctr"/>
           <a:lstStyle/>
           <a:p>
-            <a:pPr algn="ctr" indent="0" marL="0">
+            <a:pPr marL="0" indent="0" algn="ctr">
               <a:buNone/>
             </a:pPr>
             <a:r>
@@ -12944,7 +12694,7 @@
           </a:solidFill>
           <a:ln/>
           <a:effectLst>
-            <a:outerShdw sx="100000" sy="100000" kx="0" ky="0" algn="bl" rotWithShape="0" blurRad="101600" dist="38100" dir="5400000">
+            <a:outerShdw blurRad="101600" dist="38100" dir="5400000" algn="bl" rotWithShape="0">
               <a:srgbClr val="8AA0B8">
                 <a:alpha val="35000"/>
               </a:srgbClr>
@@ -12973,7 +12723,7 @@
           <a:bodyPr wrap="square" lIns="0" tIns="0" rIns="0" bIns="0" rtlCol="0" anchor="ctr"/>
           <a:lstStyle/>
           <a:p>
-            <a:pPr algn="ctr" indent="0" marL="0">
+            <a:pPr marL="0" indent="0" algn="ctr">
               <a:buNone/>
             </a:pPr>
             <a:r>
@@ -13012,7 +12762,7 @@
           <a:bodyPr wrap="square" lIns="0" tIns="0" rIns="0" bIns="0" rtlCol="0" anchor="ctr"/>
           <a:lstStyle/>
           <a:p>
-            <a:pPr algn="ctr" indent="0" marL="0">
+            <a:pPr marL="0" indent="0" algn="ctr">
               <a:buNone/>
             </a:pPr>
             <a:r>
@@ -13032,7 +12782,7 @@
       </p:sp>
       <p:graphicFrame>
         <p:nvGraphicFramePr>
-          <p:cNvPr id="13" name="Chart 0" descr=""/>
+          <p:cNvPr id="13" name="Chart 0"/>
           <p:cNvGraphicFramePr/>
           <p:nvPr/>
         </p:nvGraphicFramePr>
@@ -13040,9 +12790,9 @@
           <a:off x="548640" y="3794760"/>
           <a:ext cx="7315200" cy="2651760"/>
         </p:xfrm>
-        <a:graphic xmlns:a="http://schemas.openxmlformats.org/drawingml/2006/main">
+        <a:graphic>
           <a:graphicData uri="http://schemas.openxmlformats.org/drawingml/2006/chart">
-            <c:chart xmlns:c="http://schemas.openxmlformats.org/drawingml/2006/chart" r:id="rId1"/>
+            <c:chart xmlns:c="http://schemas.openxmlformats.org/drawingml/2006/chart" xmlns:r="http://schemas.openxmlformats.org/officeDocument/2006/relationships" r:id="rId3"/>
           </a:graphicData>
         </a:graphic>
       </p:graphicFrame>
@@ -13067,7 +12817,7 @@
           </a:solidFill>
           <a:ln/>
           <a:effectLst>
-            <a:outerShdw sx="100000" sy="100000" kx="0" ky="0" algn="bl" rotWithShape="0" blurRad="101600" dist="38100" dir="5400000">
+            <a:outerShdw blurRad="101600" dist="38100" dir="5400000" algn="bl" rotWithShape="0">
               <a:srgbClr val="8AA0B8">
                 <a:alpha val="35000"/>
               </a:srgbClr>
@@ -13096,7 +12846,7 @@
           <a:bodyPr wrap="square" lIns="0" tIns="0" rIns="0" bIns="0" rtlCol="0" anchor="t"/>
           <a:lstStyle/>
           <a:p>
-            <a:pPr indent="0" marL="0">
+            <a:pPr marL="0" indent="0">
               <a:lnSpc>
                 <a:spcPct val="105000"/>
               </a:lnSpc>
@@ -13138,7 +12888,7 @@
           <a:bodyPr wrap="square" lIns="0" tIns="0" rIns="0" bIns="0" rtlCol="0" anchor="ctr"/>
           <a:lstStyle/>
           <a:p>
-            <a:pPr indent="0" marL="0">
+            <a:pPr marL="0" indent="0">
               <a:lnSpc>
                 <a:spcPct val="105000"/>
               </a:lnSpc>
@@ -13180,7 +12930,7 @@
           <a:bodyPr wrap="square" lIns="0" tIns="0" rIns="0" bIns="0" rtlCol="0" anchor="ctr"/>
           <a:lstStyle/>
           <a:p>
-            <a:pPr indent="0" marL="0">
+            <a:pPr marL="0" indent="0">
               <a:buNone/>
             </a:pPr>
             <a:r>
@@ -13219,7 +12969,7 @@
           <a:bodyPr wrap="square" lIns="0" tIns="0" rIns="0" bIns="0" rtlCol="0" anchor="ctr"/>
           <a:lstStyle/>
           <a:p>
-            <a:pPr algn="r" indent="0" marL="0">
+            <a:pPr marL="0" indent="0" algn="r">
               <a:buNone/>
             </a:pPr>
             <a:r>
@@ -13538,4 +13288,299 @@
     </a:ext>
   </a:extLst>
 </a:theme>
+</file>
+
+<file path=ppt/theme/theme2.xml><?xml version="1.0" encoding="utf-8"?>
+<a:theme xmlns:a="http://schemas.openxmlformats.org/drawingml/2006/main" name="Office Theme">
+  <a:themeElements>
+    <a:clrScheme name="Office">
+      <a:dk1>
+        <a:sysClr val="windowText" lastClr="000000"/>
+      </a:dk1>
+      <a:lt1>
+        <a:sysClr val="window" lastClr="FFFFFF"/>
+      </a:lt1>
+      <a:dk2>
+        <a:srgbClr val="44546A"/>
+      </a:dk2>
+      <a:lt2>
+        <a:srgbClr val="E7E6E6"/>
+      </a:lt2>
+      <a:accent1>
+        <a:srgbClr val="4472C4"/>
+      </a:accent1>
+      <a:accent2>
+        <a:srgbClr val="ED7D31"/>
+      </a:accent2>
+      <a:accent3>
+        <a:srgbClr val="A5A5A5"/>
+      </a:accent3>
+      <a:accent4>
+        <a:srgbClr val="FFC000"/>
+      </a:accent4>
+      <a:accent5>
+        <a:srgbClr val="5B9BD5"/>
+      </a:accent5>
+      <a:accent6>
+        <a:srgbClr val="70AD47"/>
+      </a:accent6>
+      <a:hlink>
+        <a:srgbClr val="0563C1"/>
+      </a:hlink>
+      <a:folHlink>
+        <a:srgbClr val="954F72"/>
+      </a:folHlink>
+    </a:clrScheme>
+    <a:fontScheme name="Office">
+      <a:majorFont>
+        <a:latin typeface="Calibri Light" panose="020F0302020204030204"/>
+        <a:ea typeface=""/>
+        <a:cs typeface=""/>
+        <a:font script="Jpan" typeface="游ゴシック Light"/>
+        <a:font script="Hang" typeface="맑은 고딕"/>
+        <a:font script="Hans" typeface="等线 Light"/>
+        <a:font script="Hant" typeface="新細明體"/>
+        <a:font script="Arab" typeface="Times New Roman"/>
+        <a:font script="Hebr" typeface="Times New Roman"/>
+        <a:font script="Thai" typeface="Angsana New"/>
+        <a:font script="Ethi" typeface="Nyala"/>
+        <a:font script="Beng" typeface="Vrinda"/>
+        <a:font script="Gujr" typeface="Shruti"/>
+        <a:font script="Khmr" typeface="MoolBoran"/>
+        <a:font script="Knda" typeface="Tunga"/>
+        <a:font script="Guru" typeface="Raavi"/>
+        <a:font script="Cans" typeface="Euphemia"/>
+        <a:font script="Cher" typeface="Plantagenet Cherokee"/>
+        <a:font script="Yiii" typeface="Microsoft Yi Baiti"/>
+        <a:font script="Tibt" typeface="Microsoft Himalaya"/>
+        <a:font script="Thaa" typeface="MV Boli"/>
+        <a:font script="Deva" typeface="Mangal"/>
+        <a:font script="Telu" typeface="Gautami"/>
+        <a:font script="Taml" typeface="Latha"/>
+        <a:font script="Syrc" typeface="Estrangelo Edessa"/>
+        <a:font script="Orya" typeface="Kalinga"/>
+        <a:font script="Mlym" typeface="Kartika"/>
+        <a:font script="Laoo" typeface="DokChampa"/>
+        <a:font script="Sinh" typeface="Iskoola Pota"/>
+        <a:font script="Mong" typeface="Mongolian Baiti"/>
+        <a:font script="Viet" typeface="Times New Roman"/>
+        <a:font script="Uigh" typeface="Microsoft Uighur"/>
+        <a:font script="Geor" typeface="Sylfaen"/>
+        <a:font script="Armn" typeface="Arial"/>
+        <a:font script="Bugi" typeface="Leelawadee UI"/>
+        <a:font script="Bopo" typeface="Microsoft JhengHei"/>
+        <a:font script="Java" typeface="Javanese Text"/>
+        <a:font script="Lisu" typeface="Segoe UI"/>
+        <a:font script="Mymr" typeface="Myanmar Text"/>
+        <a:font script="Nkoo" typeface="Ebrima"/>
+        <a:font script="Olck" typeface="Nirmala UI"/>
+        <a:font script="Osma" typeface="Ebrima"/>
+        <a:font script="Phag" typeface="Phagspa"/>
+        <a:font script="Syrn" typeface="Estrangelo Edessa"/>
+        <a:font script="Syrj" typeface="Estrangelo Edessa"/>
+        <a:font script="Syre" typeface="Estrangelo Edessa"/>
+        <a:font script="Sora" typeface="Nirmala UI"/>
+        <a:font script="Tale" typeface="Microsoft Tai Le"/>
+        <a:font script="Talu" typeface="Microsoft New Tai Lue"/>
+        <a:font script="Tfng" typeface="Ebrima"/>
+      </a:majorFont>
+      <a:minorFont>
+        <a:latin typeface="Calibri" panose="020F0502020204030204"/>
+        <a:ea typeface=""/>
+        <a:cs typeface=""/>
+        <a:font script="Jpan" typeface="游ゴシック"/>
+        <a:font script="Hang" typeface="맑은 고딕"/>
+        <a:font script="Hans" typeface="等线"/>
+        <a:font script="Hant" typeface="新細明體"/>
+        <a:font script="Arab" typeface="Arial"/>
+        <a:font script="Hebr" typeface="Arial"/>
+        <a:font script="Thai" typeface="Cordia New"/>
+        <a:font script="Ethi" typeface="Nyala"/>
+        <a:font script="Beng" typeface="Vrinda"/>
+        <a:font script="Gujr" typeface="Shruti"/>
+        <a:font script="Khmr" typeface="DaunPenh"/>
+        <a:font script="Knda" typeface="Tunga"/>
+        <a:font script="Guru" typeface="Raavi"/>
+        <a:font script="Cans" typeface="Euphemia"/>
+        <a:font script="Cher" typeface="Plantagenet Cherokee"/>
+        <a:font script="Yiii" typeface="Microsoft Yi Baiti"/>
+        <a:font script="Tibt" typeface="Microsoft Himalaya"/>
+        <a:font script="Thaa" typeface="MV Boli"/>
+        <a:font script="Deva" typeface="Mangal"/>
+        <a:font script="Telu" typeface="Gautami"/>
+        <a:font script="Taml" typeface="Latha"/>
+        <a:font script="Syrc" typeface="Estrangelo Edessa"/>
+        <a:font script="Orya" typeface="Kalinga"/>
+        <a:font script="Mlym" typeface="Kartika"/>
+        <a:font script="Laoo" typeface="DokChampa"/>
+        <a:font script="Sinh" typeface="Iskoola Pota"/>
+        <a:font script="Mong" typeface="Mongolian Baiti"/>
+        <a:font script="Viet" typeface="Arial"/>
+        <a:font script="Uigh" typeface="Microsoft Uighur"/>
+        <a:font script="Geor" typeface="Sylfaen"/>
+        <a:font script="Armn" typeface="Arial"/>
+        <a:font script="Bugi" typeface="Leelawadee UI"/>
+        <a:font script="Bopo" typeface="Microsoft JhengHei"/>
+        <a:font script="Java" typeface="Javanese Text"/>
+        <a:font script="Lisu" typeface="Segoe UI"/>
+        <a:font script="Mymr" typeface="Myanmar Text"/>
+        <a:font script="Nkoo" typeface="Ebrima"/>
+        <a:font script="Olck" typeface="Nirmala UI"/>
+        <a:font script="Osma" typeface="Ebrima"/>
+        <a:font script="Phag" typeface="Phagspa"/>
+        <a:font script="Syrn" typeface="Estrangelo Edessa"/>
+        <a:font script="Syrj" typeface="Estrangelo Edessa"/>
+        <a:font script="Syre" typeface="Estrangelo Edessa"/>
+        <a:font script="Sora" typeface="Nirmala UI"/>
+        <a:font script="Tale" typeface="Microsoft Tai Le"/>
+        <a:font script="Talu" typeface="Microsoft New Tai Lue"/>
+        <a:font script="Tfng" typeface="Ebrima"/>
+      </a:minorFont>
+    </a:fontScheme>
+    <a:fmtScheme name="Office">
+      <a:fillStyleLst>
+        <a:solidFill>
+          <a:schemeClr val="phClr"/>
+        </a:solidFill>
+        <a:gradFill rotWithShape="1">
+          <a:gsLst>
+            <a:gs pos="0">
+              <a:schemeClr val="phClr">
+                <a:lumMod val="110000"/>
+                <a:satMod val="105000"/>
+                <a:tint val="67000"/>
+              </a:schemeClr>
+            </a:gs>
+            <a:gs pos="50000">
+              <a:schemeClr val="phClr">
+                <a:lumMod val="105000"/>
+                <a:satMod val="103000"/>
+                <a:tint val="73000"/>
+              </a:schemeClr>
+            </a:gs>
+            <a:gs pos="100000">
+              <a:schemeClr val="phClr">
+                <a:lumMod val="105000"/>
+                <a:satMod val="109000"/>
+                <a:tint val="81000"/>
+              </a:schemeClr>
+            </a:gs>
+          </a:gsLst>
+          <a:lin ang="5400000" scaled="0"/>
+        </a:gradFill>
+        <a:gradFill rotWithShape="1">
+          <a:gsLst>
+            <a:gs pos="0">
+              <a:schemeClr val="phClr">
+                <a:satMod val="103000"/>
+                <a:lumMod val="102000"/>
+                <a:tint val="94000"/>
+              </a:schemeClr>
+            </a:gs>
+            <a:gs pos="50000">
+              <a:schemeClr val="phClr">
+                <a:satMod val="110000"/>
+                <a:lumMod val="100000"/>
+                <a:shade val="100000"/>
+              </a:schemeClr>
+            </a:gs>
+            <a:gs pos="100000">
+              <a:schemeClr val="phClr">
+                <a:lumMod val="99000"/>
+                <a:satMod val="120000"/>
+                <a:shade val="78000"/>
+              </a:schemeClr>
+            </a:gs>
+          </a:gsLst>
+          <a:lin ang="5400000" scaled="0"/>
+        </a:gradFill>
+      </a:fillStyleLst>
+      <a:lnStyleLst>
+        <a:ln w="6350" cap="flat" cmpd="sng" algn="ctr">
+          <a:solidFill>
+            <a:schemeClr val="phClr"/>
+          </a:solidFill>
+          <a:prstDash val="solid"/>
+          <a:miter lim="800000"/>
+        </a:ln>
+        <a:ln w="12700" cap="flat" cmpd="sng" algn="ctr">
+          <a:solidFill>
+            <a:schemeClr val="phClr"/>
+          </a:solidFill>
+          <a:prstDash val="solid"/>
+          <a:miter lim="800000"/>
+        </a:ln>
+        <a:ln w="19050" cap="flat" cmpd="sng" algn="ctr">
+          <a:solidFill>
+            <a:schemeClr val="phClr"/>
+          </a:solidFill>
+          <a:prstDash val="solid"/>
+          <a:miter lim="800000"/>
+        </a:ln>
+      </a:lnStyleLst>
+      <a:effectStyleLst>
+        <a:effectStyle>
+          <a:effectLst/>
+        </a:effectStyle>
+        <a:effectStyle>
+          <a:effectLst/>
+        </a:effectStyle>
+        <a:effectStyle>
+          <a:effectLst>
+            <a:outerShdw blurRad="57150" dist="19050" dir="5400000" algn="ctr" rotWithShape="0">
+              <a:srgbClr val="000000">
+                <a:alpha val="63000"/>
+              </a:srgbClr>
+            </a:outerShdw>
+          </a:effectLst>
+        </a:effectStyle>
+      </a:effectStyleLst>
+      <a:bgFillStyleLst>
+        <a:solidFill>
+          <a:schemeClr val="phClr"/>
+        </a:solidFill>
+        <a:solidFill>
+          <a:schemeClr val="phClr">
+            <a:tint val="95000"/>
+            <a:satMod val="170000"/>
+          </a:schemeClr>
+        </a:solidFill>
+        <a:gradFill rotWithShape="1">
+          <a:gsLst>
+            <a:gs pos="0">
+              <a:schemeClr val="phClr">
+                <a:tint val="93000"/>
+                <a:satMod val="150000"/>
+                <a:shade val="98000"/>
+                <a:lumMod val="102000"/>
+              </a:schemeClr>
+            </a:gs>
+            <a:gs pos="50000">
+              <a:schemeClr val="phClr">
+                <a:tint val="98000"/>
+                <a:satMod val="130000"/>
+                <a:shade val="90000"/>
+                <a:lumMod val="103000"/>
+              </a:schemeClr>
+            </a:gs>
+            <a:gs pos="100000">
+              <a:schemeClr val="phClr">
+                <a:shade val="63000"/>
+                <a:satMod val="120000"/>
+              </a:schemeClr>
+            </a:gs>
+          </a:gsLst>
+          <a:lin ang="5400000" scaled="0"/>
+        </a:gradFill>
+      </a:bgFillStyleLst>
+    </a:fmtScheme>
+  </a:themeElements>
+  <a:objectDefaults/>
+  <a:extraClrSchemeLst/>
+  <a:extLst>
+    <a:ext uri="{05A4C25C-085E-4340-85A3-A5531E510DB2}">
+      <thm15:themeFamily xmlns:thm15="http://schemas.microsoft.com/office/thememl/2012/main" name="Office Theme" id="{62F939B6-93AF-4DB8-9C6B-D6C7DFDC589F}" vid="{4A3C46E8-61CC-4603-A589-7422A47A8E4A}"/>
+    </a:ext>
+  </a:extLst>
+</a:theme>
 </file>